--- a/ppt/smart-building-energy.pptx
+++ b/ppt/smart-building-energy.pptx
@@ -3101,87 +3101,8 @@
         </p:nvSpPr>
         <p:spPr>
           <a:xfrm>
-            <a:off x="731520" y="1965960"/>
-            <a:ext cx="10725912" cy="27432"/>
-          </a:xfrm>
-          <a:prstGeom prst="rect">
-            <a:avLst/>
-          </a:prstGeom>
-          <a:solidFill>
-            <a:srgbClr val="232A26"/>
-          </a:solidFill>
-          <a:ln>
-            <a:noFill/>
-          </a:ln>
-          <a:effectLst/>
-        </p:spPr>
-        <p:style>
-          <a:lnRef idx="1">
-            <a:schemeClr val="accent1"/>
-          </a:lnRef>
-          <a:fillRef idx="3">
-            <a:schemeClr val="accent1"/>
-          </a:fillRef>
-          <a:effectRef idx="2">
-            <a:schemeClr val="accent1"/>
-          </a:effectRef>
-          <a:fontRef idx="minor">
-            <a:schemeClr val="lt1"/>
-          </a:fontRef>
-        </p:style>
-        <p:txBody>
-          <a:bodyPr rtlCol="0" anchor="ctr"/>
-          <a:lstStyle/>
-          <a:p>
-            <a:pPr algn="ctr"/>
-          </a:p>
-        </p:txBody>
-      </p:sp>
-      <p:sp>
-        <p:nvSpPr>
-          <p:cNvPr id="3" name="TextBox 2"/>
-          <p:cNvSpPr txBox="1"/>
-          <p:nvPr/>
-        </p:nvSpPr>
-        <p:spPr>
-          <a:xfrm>
-            <a:off x="731520" y="2148840"/>
-            <a:ext cx="10698480" cy="1371600"/>
-          </a:xfrm>
-          <a:prstGeom prst="rect">
-            <a:avLst/>
-          </a:prstGeom>
-          <a:noFill/>
-        </p:spPr>
-        <p:txBody>
-          <a:bodyPr wrap="square" anchor="t">
-            <a:spAutoFit/>
-          </a:bodyPr>
-          <a:lstStyle/>
-          <a:p>
-            <a:pPr algn="l"/>
-            <a:r>
-              <a:rPr sz="3100" b="1">
-                <a:solidFill>
-                  <a:srgbClr val="2F7A5E"/>
-                </a:solidFill>
-                <a:latin typeface="Constantia"/>
-              </a:rPr>
-              <a:t>Smart Building Energy Monitoring</a:t>
-            </a:r>
-          </a:p>
-        </p:txBody>
-      </p:sp>
-      <p:sp>
-        <p:nvSpPr>
-          <p:cNvPr id="4" name="Rectangle 3"/>
-          <p:cNvSpPr/>
-          <p:nvPr/>
-        </p:nvSpPr>
-        <p:spPr>
-          <a:xfrm>
-            <a:off x="731520" y="3429000"/>
-            <a:ext cx="10725912" cy="50292"/>
+            <a:off x="-91440" y="-91440"/>
+            <a:ext cx="12435840" cy="7040880"/>
           </a:xfrm>
           <a:prstGeom prst="rect">
             <a:avLst/>
@@ -3218,14 +3139,58 @@
       </p:sp>
       <p:sp>
         <p:nvSpPr>
-          <p:cNvPr id="5" name="TextBox 4"/>
+          <p:cNvPr id="3" name="Oval 2"/>
+          <p:cNvSpPr/>
+          <p:nvPr/>
+        </p:nvSpPr>
+        <p:spPr>
+          <a:xfrm>
+            <a:off x="5410504" y="731520"/>
+            <a:ext cx="1371600" cy="1371600"/>
+          </a:xfrm>
+          <a:prstGeom prst="ellipse">
+            <a:avLst/>
+          </a:prstGeom>
+          <a:solidFill>
+            <a:srgbClr val="FFFFFF"/>
+          </a:solidFill>
+          <a:ln>
+            <a:noFill/>
+          </a:ln>
+          <a:effectLst/>
+        </p:spPr>
+        <p:style>
+          <a:lnRef idx="1">
+            <a:schemeClr val="accent1"/>
+          </a:lnRef>
+          <a:fillRef idx="3">
+            <a:schemeClr val="accent1"/>
+          </a:fillRef>
+          <a:effectRef idx="2">
+            <a:schemeClr val="accent1"/>
+          </a:effectRef>
+          <a:fontRef idx="minor">
+            <a:schemeClr val="lt1"/>
+          </a:fontRef>
+        </p:style>
+        <p:txBody>
+          <a:bodyPr rtlCol="0" anchor="ctr"/>
+          <a:lstStyle/>
+          <a:p>
+            <a:pPr algn="ctr"/>
+          </a:p>
+        </p:txBody>
+      </p:sp>
+      <p:sp>
+        <p:nvSpPr>
+          <p:cNvPr id="4" name="TextBox 3"/>
           <p:cNvSpPr txBox="1"/>
           <p:nvPr/>
         </p:nvSpPr>
         <p:spPr>
           <a:xfrm>
-            <a:off x="731520" y="3657600"/>
-            <a:ext cx="10698480" cy="2011680"/>
+            <a:off x="5410504" y="731520"/>
+            <a:ext cx="1371600" cy="1371600"/>
           </a:xfrm>
           <a:prstGeom prst="rect">
             <a:avLst/>
@@ -3233,40 +3198,121 @@
           <a:noFill/>
         </p:spPr>
         <p:txBody>
+          <a:bodyPr wrap="none" anchor="ctr">
+            <a:spAutoFit/>
+          </a:bodyPr>
+          <a:lstStyle/>
+          <a:p>
+            <a:pPr algn="ctr"/>
+            <a:r>
+              <a:rPr sz="4500" b="1">
+                <a:solidFill>
+                  <a:srgbClr val="2F7A5E"/>
+                </a:solidFill>
+                <a:latin typeface="Constantia"/>
+              </a:rPr>
+              <a:t>SB</a:t>
+            </a:r>
+          </a:p>
+        </p:txBody>
+      </p:sp>
+      <p:sp>
+        <p:nvSpPr>
+          <p:cNvPr id="5" name="TextBox 4"/>
+          <p:cNvSpPr txBox="1"/>
+          <p:nvPr/>
+        </p:nvSpPr>
+        <p:spPr>
+          <a:xfrm>
+            <a:off x="914400" y="2514600"/>
+            <a:ext cx="10332720" cy="1554480"/>
+          </a:xfrm>
+          <a:prstGeom prst="rect">
+            <a:avLst/>
+          </a:prstGeom>
+          <a:noFill/>
+        </p:spPr>
+        <p:txBody>
+          <a:bodyPr wrap="square" anchor="ctr">
+            <a:spAutoFit/>
+          </a:bodyPr>
+          <a:lstStyle/>
+          <a:p>
+            <a:pPr algn="ctr"/>
+            <a:r>
+              <a:rPr sz="3400" b="1" i="0">
+                <a:solidFill>
+                  <a:srgbClr val="FFFFFF"/>
+                </a:solidFill>
+                <a:latin typeface="Constantia"/>
+              </a:rPr>
+              <a:t>Smart Building Energy Monitoring</a:t>
+            </a:r>
+          </a:p>
+        </p:txBody>
+      </p:sp>
+      <p:sp>
+        <p:nvSpPr>
+          <p:cNvPr id="6" name="TextBox 5"/>
+          <p:cNvSpPr txBox="1"/>
+          <p:nvPr/>
+        </p:nvSpPr>
+        <p:spPr>
+          <a:xfrm>
+            <a:off x="1371600" y="3977639"/>
+            <a:ext cx="9418320" cy="548640"/>
+          </a:xfrm>
+          <a:prstGeom prst="rect">
+            <a:avLst/>
+          </a:prstGeom>
+          <a:noFill/>
+        </p:spPr>
+        <p:txBody>
           <a:bodyPr wrap="square" anchor="t">
             <a:spAutoFit/>
           </a:bodyPr>
           <a:lstStyle/>
           <a:p>
-            <a:pPr algn="l"/>
-            <a:r>
-              <a:rPr sz="1800" b="0">
-                <a:solidFill>
-                  <a:srgbClr val="5C655F"/>
+            <a:pPr algn="ctr"/>
+            <a:r>
+              <a:rPr sz="1800" b="0" i="1">
+                <a:solidFill>
+                  <a:srgbClr val="C4D9D1"/>
                 </a:solidFill>
                 <a:latin typeface="Georgia"/>
               </a:rPr>
               <a:t>Live per-floor energy, air-quality and water insight from a fog and edge pipeline</a:t>
             </a:r>
           </a:p>
-          <a:p>
-            <a:pPr algn="l"/>
-            <a:r>
-              <a:rPr sz="1600" b="1">
-                <a:solidFill>
-                  <a:srgbClr val="232A26"/>
-                </a:solidFill>
-                <a:latin typeface="Georgia"/>
-              </a:rPr>
-              <a:t/>
-            </a:r>
-          </a:p>
-          <a:p>
-            <a:pPr algn="l"/>
-            <a:r>
-              <a:rPr sz="1300" b="0">
-                <a:solidFill>
-                  <a:srgbClr val="5C655F"/>
+        </p:txBody>
+      </p:sp>
+      <p:sp>
+        <p:nvSpPr>
+          <p:cNvPr id="7" name="TextBox 6"/>
+          <p:cNvSpPr txBox="1"/>
+          <p:nvPr/>
+        </p:nvSpPr>
+        <p:spPr>
+          <a:xfrm>
+            <a:off x="1371600" y="4892040"/>
+            <a:ext cx="9418320" cy="1463040"/>
+          </a:xfrm>
+          <a:prstGeom prst="rect">
+            <a:avLst/>
+          </a:prstGeom>
+          <a:noFill/>
+        </p:spPr>
+        <p:txBody>
+          <a:bodyPr wrap="square" anchor="t">
+            <a:spAutoFit/>
+          </a:bodyPr>
+          <a:lstStyle/>
+          <a:p>
+            <a:pPr algn="ctr"/>
+            <a:r>
+              <a:rPr sz="1250" b="0" i="0">
+                <a:solidFill>
+                  <a:srgbClr val="AFCCC1"/>
                 </a:solidFill>
                 <a:latin typeface="Georgia"/>
               </a:rPr>
@@ -3274,11 +3320,11 @@
             </a:r>
           </a:p>
           <a:p>
-            <a:pPr algn="l"/>
-            <a:r>
-              <a:rPr sz="1300" b="0">
-                <a:solidFill>
-                  <a:srgbClr val="5C655F"/>
+            <a:pPr algn="ctr"/>
+            <a:r>
+              <a:rPr sz="1250" b="0" i="0">
+                <a:solidFill>
+                  <a:srgbClr val="AFCCC1"/>
                 </a:solidFill>
                 <a:latin typeface="Georgia"/>
               </a:rPr>

--- a/ppt/smart-building-energy.pptx
+++ b/ppt/smart-building-energy.pptx
@@ -3139,58 +3139,14 @@
       </p:sp>
       <p:sp>
         <p:nvSpPr>
-          <p:cNvPr id="3" name="Oval 2"/>
-          <p:cNvSpPr/>
+          <p:cNvPr id="3" name="TextBox 2"/>
+          <p:cNvSpPr txBox="1"/>
           <p:nvPr/>
         </p:nvSpPr>
         <p:spPr>
           <a:xfrm>
-            <a:off x="5410504" y="731520"/>
-            <a:ext cx="1371600" cy="1371600"/>
-          </a:xfrm>
-          <a:prstGeom prst="ellipse">
-            <a:avLst/>
-          </a:prstGeom>
-          <a:solidFill>
-            <a:srgbClr val="FFFFFF"/>
-          </a:solidFill>
-          <a:ln>
-            <a:noFill/>
-          </a:ln>
-          <a:effectLst/>
-        </p:spPr>
-        <p:style>
-          <a:lnRef idx="1">
-            <a:schemeClr val="accent1"/>
-          </a:lnRef>
-          <a:fillRef idx="3">
-            <a:schemeClr val="accent1"/>
-          </a:fillRef>
-          <a:effectRef idx="2">
-            <a:schemeClr val="accent1"/>
-          </a:effectRef>
-          <a:fontRef idx="minor">
-            <a:schemeClr val="lt1"/>
-          </a:fontRef>
-        </p:style>
-        <p:txBody>
-          <a:bodyPr rtlCol="0" anchor="ctr"/>
-          <a:lstStyle/>
-          <a:p>
-            <a:pPr algn="ctr"/>
-          </a:p>
-        </p:txBody>
-      </p:sp>
-      <p:sp>
-        <p:nvSpPr>
-          <p:cNvPr id="4" name="TextBox 3"/>
-          <p:cNvSpPr txBox="1"/>
-          <p:nvPr/>
-        </p:nvSpPr>
-        <p:spPr>
-          <a:xfrm>
-            <a:off x="5410504" y="731520"/>
-            <a:ext cx="1371600" cy="1371600"/>
+            <a:off x="914400" y="2011680"/>
+            <a:ext cx="10332720" cy="1783080"/>
           </a:xfrm>
           <a:prstGeom prst="rect">
             <a:avLst/>
@@ -3198,41 +3154,6 @@
           <a:noFill/>
         </p:spPr>
         <p:txBody>
-          <a:bodyPr wrap="none" anchor="ctr">
-            <a:spAutoFit/>
-          </a:bodyPr>
-          <a:lstStyle/>
-          <a:p>
-            <a:pPr algn="ctr"/>
-            <a:r>
-              <a:rPr sz="4500" b="1">
-                <a:solidFill>
-                  <a:srgbClr val="2F7A5E"/>
-                </a:solidFill>
-                <a:latin typeface="Constantia"/>
-              </a:rPr>
-              <a:t>SB</a:t>
-            </a:r>
-          </a:p>
-        </p:txBody>
-      </p:sp>
-      <p:sp>
-        <p:nvSpPr>
-          <p:cNvPr id="5" name="TextBox 4"/>
-          <p:cNvSpPr txBox="1"/>
-          <p:nvPr/>
-        </p:nvSpPr>
-        <p:spPr>
-          <a:xfrm>
-            <a:off x="914400" y="2514600"/>
-            <a:ext cx="10332720" cy="1554480"/>
-          </a:xfrm>
-          <a:prstGeom prst="rect">
-            <a:avLst/>
-          </a:prstGeom>
-          <a:noFill/>
-        </p:spPr>
-        <p:txBody>
           <a:bodyPr wrap="square" anchor="ctr">
             <a:spAutoFit/>
           </a:bodyPr>
@@ -3253,13 +3174,13 @@
       </p:sp>
       <p:sp>
         <p:nvSpPr>
-          <p:cNvPr id="6" name="TextBox 5"/>
+          <p:cNvPr id="4" name="TextBox 3"/>
           <p:cNvSpPr txBox="1"/>
           <p:nvPr/>
         </p:nvSpPr>
         <p:spPr>
           <a:xfrm>
-            <a:off x="1371600" y="3977639"/>
+            <a:off x="1371600" y="3840480"/>
             <a:ext cx="9418320" cy="548640"/>
           </a:xfrm>
           <a:prstGeom prst="rect">
@@ -3288,13 +3209,13 @@
       </p:sp>
       <p:sp>
         <p:nvSpPr>
-          <p:cNvPr id="7" name="TextBox 6"/>
+          <p:cNvPr id="5" name="TextBox 4"/>
           <p:cNvSpPr txBox="1"/>
           <p:nvPr/>
         </p:nvSpPr>
         <p:spPr>
           <a:xfrm>
-            <a:off x="1371600" y="4892040"/>
+            <a:off x="1371600" y="4709160"/>
             <a:ext cx="9418320" cy="1463040"/>
           </a:xfrm>
           <a:prstGeom prst="rect">

--- a/ppt/smart-building-energy.pptx
+++ b/ppt/smart-building-energy.pptx
@@ -3108,7 +3108,7 @@
             <a:avLst/>
           </a:prstGeom>
           <a:solidFill>
-            <a:srgbClr val="2F7A5E"/>
+            <a:srgbClr val="6A4A9A"/>
           </a:solidFill>
           <a:ln>
             <a:noFill/>
@@ -3198,7 +3198,7 @@
             <a:r>
               <a:rPr sz="1800" b="0" i="1">
                 <a:solidFill>
-                  <a:srgbClr val="C4D9D1"/>
+                  <a:srgbClr val="D5CCE2"/>
                 </a:solidFill>
                 <a:latin typeface="Georgia"/>
               </a:rPr>
@@ -3233,7 +3233,7 @@
             <a:r>
               <a:rPr sz="1250" b="0" i="0">
                 <a:solidFill>
-                  <a:srgbClr val="AFCCC1"/>
+                  <a:srgbClr val="C6BAD8"/>
                 </a:solidFill>
                 <a:latin typeface="Georgia"/>
               </a:rPr>
@@ -3245,7 +3245,7 @@
             <a:r>
               <a:rPr sz="1250" b="0" i="0">
                 <a:solidFill>
-                  <a:srgbClr val="AFCCC1"/>
+                  <a:srgbClr val="C6BAD8"/>
                 </a:solidFill>
                 <a:latin typeface="Georgia"/>
               </a:rPr>
@@ -3383,7 +3383,7 @@
             <a:r>
               <a:rPr sz="1500" b="1">
                 <a:solidFill>
-                  <a:srgbClr val="2F7A5E"/>
+                  <a:srgbClr val="6A4A9A"/>
                 </a:solidFill>
                 <a:latin typeface="Georgia"/>
               </a:rPr>
@@ -3399,7 +3399,7 @@
             <a:r>
               <a:rPr sz="1500" b="1">
                 <a:solidFill>
-                  <a:srgbClr val="2F7A5E"/>
+                  <a:srgbClr val="6A4A9A"/>
                 </a:solidFill>
                 <a:latin typeface="Georgia"/>
               </a:rPr>
@@ -3471,7 +3471,7 @@
             <a:avLst/>
           </a:prstGeom>
           <a:solidFill>
-            <a:srgbClr val="2F7A5E"/>
+            <a:srgbClr val="6A4A9A"/>
           </a:solidFill>
           <a:ln>
             <a:noFill/>
@@ -3515,7 +3515,7 @@
             <a:avLst/>
           </a:prstGeom>
           <a:solidFill>
-            <a:srgbClr val="2F7A5E"/>
+            <a:srgbClr val="6A4A9A"/>
           </a:solidFill>
           <a:ln>
             <a:noFill/>
@@ -3625,7 +3625,7 @@
             <a:r>
               <a:rPr sz="1500" b="1">
                 <a:solidFill>
-                  <a:srgbClr val="2F7A5E"/>
+                  <a:srgbClr val="6A4A9A"/>
                 </a:solidFill>
                 <a:latin typeface="Georgia"/>
               </a:rPr>
@@ -3657,7 +3657,7 @@
             <a:r>
               <a:rPr sz="1500" b="1">
                 <a:solidFill>
-                  <a:srgbClr val="2F7A5E"/>
+                  <a:srgbClr val="6A4A9A"/>
                 </a:solidFill>
                 <a:latin typeface="Georgia"/>
               </a:rPr>
@@ -3689,7 +3689,7 @@
             <a:r>
               <a:rPr sz="1500" b="1">
                 <a:solidFill>
-                  <a:srgbClr val="2F7A5E"/>
+                  <a:srgbClr val="6A4A9A"/>
                 </a:solidFill>
                 <a:latin typeface="Georgia"/>
               </a:rPr>
@@ -3769,7 +3769,7 @@
             <a:r>
               <a:rPr sz="1500" b="1">
                 <a:solidFill>
-                  <a:srgbClr val="2F7A5E"/>
+                  <a:srgbClr val="6A4A9A"/>
                 </a:solidFill>
                 <a:latin typeface="Georgia"/>
               </a:rPr>
@@ -3793,7 +3793,7 @@
             <a:avLst/>
           </a:prstGeom>
           <a:solidFill>
-            <a:srgbClr val="2F7A5E"/>
+            <a:srgbClr val="6A4A9A"/>
           </a:solidFill>
           <a:ln>
             <a:noFill/>
@@ -3837,7 +3837,7 @@
             <a:avLst/>
           </a:prstGeom>
           <a:solidFill>
-            <a:srgbClr val="2F7A5E"/>
+            <a:srgbClr val="6A4A9A"/>
           </a:solidFill>
           <a:ln>
             <a:noFill/>
@@ -3947,7 +3947,7 @@
             <a:r>
               <a:rPr sz="1500" b="1">
                 <a:solidFill>
-                  <a:srgbClr val="2F7A5E"/>
+                  <a:srgbClr val="6A4A9A"/>
                 </a:solidFill>
                 <a:latin typeface="Georgia"/>
               </a:rPr>
@@ -4019,7 +4019,7 @@
             <a:avLst/>
           </a:prstGeom>
           <a:solidFill>
-            <a:srgbClr val="2F7A5E"/>
+            <a:srgbClr val="6A4A9A"/>
           </a:solidFill>
           <a:ln>
             <a:noFill/>
@@ -4087,7 +4087,7 @@
             <a:avLst/>
           </a:prstGeom>
           <a:solidFill>
-            <a:srgbClr val="2F7A5E"/>
+            <a:srgbClr val="6A4A9A"/>
           </a:solidFill>
           <a:ln>
             <a:noFill/>
@@ -4197,7 +4197,7 @@
             <a:r>
               <a:rPr sz="1500" b="1">
                 <a:solidFill>
-                  <a:srgbClr val="2F7A5E"/>
+                  <a:srgbClr val="6A4A9A"/>
                 </a:solidFill>
                 <a:latin typeface="Georgia"/>
               </a:rPr>
@@ -4229,7 +4229,7 @@
             <a:r>
               <a:rPr sz="1500" b="1">
                 <a:solidFill>
-                  <a:srgbClr val="2F7A5E"/>
+                  <a:srgbClr val="6A4A9A"/>
                 </a:solidFill>
                 <a:latin typeface="Georgia"/>
               </a:rPr>
@@ -4261,7 +4261,7 @@
             <a:r>
               <a:rPr sz="1500" b="1">
                 <a:solidFill>
-                  <a:srgbClr val="2F7A5E"/>
+                  <a:srgbClr val="6A4A9A"/>
                 </a:solidFill>
                 <a:latin typeface="Georgia"/>
               </a:rPr>
@@ -4333,7 +4333,7 @@
             <a:avLst/>
           </a:prstGeom>
           <a:solidFill>
-            <a:srgbClr val="2F7A5E"/>
+            <a:srgbClr val="6A4A9A"/>
           </a:solidFill>
           <a:ln>
             <a:noFill/>
@@ -4377,7 +4377,7 @@
             <a:avLst/>
           </a:prstGeom>
           <a:solidFill>
-            <a:srgbClr val="2F7A5E"/>
+            <a:srgbClr val="6A4A9A"/>
           </a:solidFill>
           <a:ln>
             <a:noFill/>
@@ -4487,7 +4487,7 @@
             <a:r>
               <a:rPr sz="1700" b="1">
                 <a:solidFill>
-                  <a:srgbClr val="2F7A5E"/>
+                  <a:srgbClr val="6A4A9A"/>
                 </a:solidFill>
                 <a:latin typeface="Georgia"/>
               </a:rPr>
@@ -4519,7 +4519,7 @@
             <a:r>
               <a:rPr sz="1700" b="1">
                 <a:solidFill>
-                  <a:srgbClr val="2F7A5E"/>
+                  <a:srgbClr val="6A4A9A"/>
                 </a:solidFill>
                 <a:latin typeface="Georgia"/>
               </a:rPr>
@@ -4551,7 +4551,7 @@
             <a:r>
               <a:rPr sz="1700" b="1">
                 <a:solidFill>
-                  <a:srgbClr val="2F7A5E"/>
+                  <a:srgbClr val="6A4A9A"/>
                 </a:solidFill>
                 <a:latin typeface="Georgia"/>
               </a:rPr>
@@ -4607,7 +4607,7 @@
             <a:avLst/>
           </a:prstGeom>
           <a:solidFill>
-            <a:srgbClr val="2F7A5E"/>
+            <a:srgbClr val="6A4A9A"/>
           </a:solidFill>
           <a:ln>
             <a:noFill/>
@@ -4651,7 +4651,7 @@
             <a:avLst/>
           </a:prstGeom>
           <a:solidFill>
-            <a:srgbClr val="2F7A5E"/>
+            <a:srgbClr val="6A4A9A"/>
           </a:solidFill>
           <a:ln>
             <a:noFill/>

--- a/ppt/smart-building-energy.pptx
+++ b/ppt/smart-building-energy.pptx
@@ -3284,8 +3284,8 @@
         </p:nvSpPr>
         <p:spPr>
           <a:xfrm>
-            <a:off x="640080" y="411480"/>
-            <a:ext cx="10972800" cy="822960"/>
+            <a:off x="713232" y="777240"/>
+            <a:ext cx="10607040" cy="868680"/>
           </a:xfrm>
         </p:spPr>
         <p:txBody>
@@ -3296,7 +3296,7 @@
             <a:r>
               <a:rPr b="1" sz="2700">
                 <a:solidFill>
-                  <a:srgbClr val="232A26"/>
+                  <a:srgbClr val="6A4A9A"/>
                 </a:solidFill>
                 <a:latin typeface="Constantia"/>
               </a:rPr>
@@ -3317,8 +3317,8 @@
         </p:nvSpPr>
         <p:spPr>
           <a:xfrm>
-            <a:off x="658368" y="1463040"/>
-            <a:ext cx="10972800" cy="4663440"/>
+            <a:off x="713232" y="1828800"/>
+            <a:ext cx="10698480" cy="4526280"/>
           </a:xfrm>
         </p:spPr>
         <p:txBody>
@@ -3464,8 +3464,8 @@
         </p:nvSpPr>
         <p:spPr>
           <a:xfrm>
-            <a:off x="658368" y="1207008"/>
-            <a:ext cx="10881360" cy="45720"/>
+            <a:off x="457200" y="457200"/>
+            <a:ext cx="3017520" cy="118872"/>
           </a:xfrm>
           <a:prstGeom prst="rect">
             <a:avLst/>
@@ -3508,8 +3508,8 @@
         </p:nvSpPr>
         <p:spPr>
           <a:xfrm>
-            <a:off x="658368" y="6355080"/>
-            <a:ext cx="2743200" cy="36576"/>
+            <a:off x="457200" y="457200"/>
+            <a:ext cx="118872" cy="1920240"/>
           </a:xfrm>
           <a:prstGeom prst="rect">
             <a:avLst/>
@@ -3574,8 +3574,8 @@
         </p:nvSpPr>
         <p:spPr>
           <a:xfrm>
-            <a:off x="640080" y="411480"/>
-            <a:ext cx="10972800" cy="822960"/>
+            <a:off x="713232" y="777240"/>
+            <a:ext cx="10607040" cy="868680"/>
           </a:xfrm>
         </p:spPr>
         <p:txBody>
@@ -3586,7 +3586,7 @@
             <a:r>
               <a:rPr b="1" sz="2700">
                 <a:solidFill>
-                  <a:srgbClr val="232A26"/>
+                  <a:srgbClr val="6A4A9A"/>
                 </a:solidFill>
                 <a:latin typeface="Constantia"/>
               </a:rPr>
@@ -3607,8 +3607,8 @@
         </p:nvSpPr>
         <p:spPr>
           <a:xfrm>
-            <a:off x="658368" y="1463040"/>
-            <a:ext cx="10972800" cy="4663440"/>
+            <a:off x="713232" y="1828800"/>
+            <a:ext cx="10698480" cy="4526280"/>
           </a:xfrm>
         </p:spPr>
         <p:txBody>
@@ -3786,8 +3786,8 @@
         </p:nvSpPr>
         <p:spPr>
           <a:xfrm>
-            <a:off x="658368" y="1207008"/>
-            <a:ext cx="10881360" cy="45720"/>
+            <a:off x="457200" y="457200"/>
+            <a:ext cx="3017520" cy="118872"/>
           </a:xfrm>
           <a:prstGeom prst="rect">
             <a:avLst/>
@@ -3830,8 +3830,8 @@
         </p:nvSpPr>
         <p:spPr>
           <a:xfrm>
-            <a:off x="658368" y="6355080"/>
-            <a:ext cx="2743200" cy="36576"/>
+            <a:off x="457200" y="457200"/>
+            <a:ext cx="118872" cy="1920240"/>
           </a:xfrm>
           <a:prstGeom prst="rect">
             <a:avLst/>
@@ -3896,8 +3896,8 @@
         </p:nvSpPr>
         <p:spPr>
           <a:xfrm>
-            <a:off x="640080" y="411480"/>
-            <a:ext cx="10972800" cy="822960"/>
+            <a:off x="713232" y="777240"/>
+            <a:ext cx="10607040" cy="868680"/>
           </a:xfrm>
         </p:spPr>
         <p:txBody>
@@ -3908,7 +3908,7 @@
             <a:r>
               <a:rPr b="1" sz="2700">
                 <a:solidFill>
-                  <a:srgbClr val="232A26"/>
+                  <a:srgbClr val="6A4A9A"/>
                 </a:solidFill>
                 <a:latin typeface="Constantia"/>
               </a:rPr>
@@ -3929,8 +3929,8 @@
         </p:nvSpPr>
         <p:spPr>
           <a:xfrm>
-            <a:off x="658368" y="1463040"/>
-            <a:ext cx="5760720" cy="4663440"/>
+            <a:off x="713232" y="1828800"/>
+            <a:ext cx="5715000" cy="4434840"/>
           </a:xfrm>
         </p:spPr>
         <p:txBody>
@@ -4012,8 +4012,8 @@
         </p:nvSpPr>
         <p:spPr>
           <a:xfrm>
-            <a:off x="658368" y="1207008"/>
-            <a:ext cx="10881360" cy="45720"/>
+            <a:off x="457200" y="457200"/>
+            <a:ext cx="3017520" cy="118872"/>
           </a:xfrm>
           <a:prstGeom prst="rect">
             <a:avLst/>
@@ -4048,40 +4048,16 @@
           </a:p>
         </p:txBody>
       </p:sp>
-      <p:pic>
-        <p:nvPicPr>
-          <p:cNvPr id="5" name="Picture 4" descr="dashboard-desktop.png"/>
-          <p:cNvPicPr>
-            <a:picLocks noChangeAspect="1"/>
-          </p:cNvPicPr>
+      <p:sp>
+        <p:nvSpPr>
+          <p:cNvPr id="5" name="Rectangle 4"/>
+          <p:cNvSpPr/>
           <p:nvPr/>
-        </p:nvPicPr>
-        <p:blipFill>
-          <a:blip r:embed="rId2"/>
-          <a:stretch>
-            <a:fillRect/>
-          </a:stretch>
-        </p:blipFill>
+        </p:nvSpPr>
         <p:spPr>
           <a:xfrm>
-            <a:off x="7178809" y="1499616"/>
-            <a:ext cx="4021821" cy="4480560"/>
-          </a:xfrm>
-          <a:prstGeom prst="rect">
-            <a:avLst/>
-          </a:prstGeom>
-        </p:spPr>
-      </p:pic>
-      <p:sp>
-        <p:nvSpPr>
-          <p:cNvPr id="6" name="Rectangle 5"/>
-          <p:cNvSpPr/>
-          <p:nvPr/>
-        </p:nvSpPr>
-        <p:spPr>
-          <a:xfrm>
-            <a:off x="658368" y="6355080"/>
-            <a:ext cx="2743200" cy="36576"/>
+            <a:off x="457200" y="457200"/>
+            <a:ext cx="118872" cy="1920240"/>
           </a:xfrm>
           <a:prstGeom prst="rect">
             <a:avLst/>
@@ -4116,6 +4092,30 @@
           </a:p>
         </p:txBody>
       </p:sp>
+      <p:pic>
+        <p:nvPicPr>
+          <p:cNvPr id="6" name="Picture 5" descr="dashboard-desktop.png"/>
+          <p:cNvPicPr>
+            <a:picLocks noChangeAspect="1"/>
+          </p:cNvPicPr>
+          <p:nvPr/>
+        </p:nvPicPr>
+        <p:blipFill>
+          <a:blip r:embed="rId2"/>
+          <a:stretch>
+            <a:fillRect/>
+          </a:stretch>
+        </p:blipFill>
+        <p:spPr>
+          <a:xfrm>
+            <a:off x="7233346" y="1874519"/>
+            <a:ext cx="3775587" cy="4206240"/>
+          </a:xfrm>
+          <a:prstGeom prst="rect">
+            <a:avLst/>
+          </a:prstGeom>
+        </p:spPr>
+      </p:pic>
     </p:spTree>
   </p:cSld>
   <p:clrMapOvr>
@@ -4146,8 +4146,8 @@
         </p:nvSpPr>
         <p:spPr>
           <a:xfrm>
-            <a:off x="640080" y="411480"/>
-            <a:ext cx="10972800" cy="822960"/>
+            <a:off x="713232" y="777240"/>
+            <a:ext cx="10607040" cy="868680"/>
           </a:xfrm>
         </p:spPr>
         <p:txBody>
@@ -4158,7 +4158,7 @@
             <a:r>
               <a:rPr b="1" sz="2700">
                 <a:solidFill>
-                  <a:srgbClr val="232A26"/>
+                  <a:srgbClr val="6A4A9A"/>
                 </a:solidFill>
                 <a:latin typeface="Constantia"/>
               </a:rPr>
@@ -4179,8 +4179,8 @@
         </p:nvSpPr>
         <p:spPr>
           <a:xfrm>
-            <a:off x="658368" y="1463040"/>
-            <a:ext cx="10972800" cy="4663440"/>
+            <a:off x="713232" y="1828800"/>
+            <a:ext cx="10698480" cy="4526280"/>
           </a:xfrm>
         </p:spPr>
         <p:txBody>
@@ -4326,8 +4326,8 @@
         </p:nvSpPr>
         <p:spPr>
           <a:xfrm>
-            <a:off x="658368" y="1207008"/>
-            <a:ext cx="10881360" cy="45720"/>
+            <a:off x="457200" y="457200"/>
+            <a:ext cx="3017520" cy="118872"/>
           </a:xfrm>
           <a:prstGeom prst="rect">
             <a:avLst/>
@@ -4370,8 +4370,8 @@
         </p:nvSpPr>
         <p:spPr>
           <a:xfrm>
-            <a:off x="658368" y="6355080"/>
-            <a:ext cx="2743200" cy="36576"/>
+            <a:off x="457200" y="457200"/>
+            <a:ext cx="118872" cy="1920240"/>
           </a:xfrm>
           <a:prstGeom prst="rect">
             <a:avLst/>
@@ -4436,8 +4436,8 @@
         </p:nvSpPr>
         <p:spPr>
           <a:xfrm>
-            <a:off x="640080" y="411480"/>
-            <a:ext cx="10972800" cy="822960"/>
+            <a:off x="713232" y="777240"/>
+            <a:ext cx="10607040" cy="868680"/>
           </a:xfrm>
         </p:spPr>
         <p:txBody>
@@ -4448,7 +4448,7 @@
             <a:r>
               <a:rPr b="1" sz="2700">
                 <a:solidFill>
-                  <a:srgbClr val="232A26"/>
+                  <a:srgbClr val="6A4A9A"/>
                 </a:solidFill>
                 <a:latin typeface="Constantia"/>
               </a:rPr>
@@ -4469,8 +4469,8 @@
         </p:nvSpPr>
         <p:spPr>
           <a:xfrm>
-            <a:off x="658368" y="1463040"/>
-            <a:ext cx="10972800" cy="4663440"/>
+            <a:off x="713232" y="1828800"/>
+            <a:ext cx="10698480" cy="4526280"/>
           </a:xfrm>
         </p:spPr>
         <p:txBody>
@@ -4600,8 +4600,8 @@
         </p:nvSpPr>
         <p:spPr>
           <a:xfrm>
-            <a:off x="658368" y="1207008"/>
-            <a:ext cx="10881360" cy="45720"/>
+            <a:off x="457200" y="457200"/>
+            <a:ext cx="3017520" cy="118872"/>
           </a:xfrm>
           <a:prstGeom prst="rect">
             <a:avLst/>
@@ -4644,8 +4644,8 @@
         </p:nvSpPr>
         <p:spPr>
           <a:xfrm>
-            <a:off x="658368" y="6355080"/>
-            <a:ext cx="2743200" cy="36576"/>
+            <a:off x="457200" y="457200"/>
+            <a:ext cx="118872" cy="1920240"/>
           </a:xfrm>
           <a:prstGeom prst="rect">
             <a:avLst/>

--- a/ppt/smart-building-energy.pptx
+++ b/ppt/smart-building-energy.pptx
@@ -3108,7 +3108,7 @@
             <a:avLst/>
           </a:prstGeom>
           <a:solidFill>
-            <a:srgbClr val="6A4A9A"/>
+            <a:srgbClr val="4A7C59"/>
           </a:solidFill>
           <a:ln>
             <a:noFill/>
@@ -3139,14 +3139,58 @@
       </p:sp>
       <p:sp>
         <p:nvSpPr>
-          <p:cNvPr id="3" name="TextBox 2"/>
+          <p:cNvPr id="3" name="Rectangle 2"/>
+          <p:cNvSpPr/>
+          <p:nvPr/>
+        </p:nvSpPr>
+        <p:spPr>
+          <a:xfrm>
+            <a:off x="457200" y="457200"/>
+            <a:ext cx="11277295" cy="5943600"/>
+          </a:xfrm>
+          <a:prstGeom prst="rect">
+            <a:avLst/>
+          </a:prstGeom>
+          <a:noFill/>
+          <a:ln w="19050">
+            <a:solidFill>
+              <a:srgbClr val="BFD1C4"/>
+            </a:solidFill>
+          </a:ln>
+          <a:effectLst/>
+        </p:spPr>
+        <p:style>
+          <a:lnRef idx="1">
+            <a:schemeClr val="accent1"/>
+          </a:lnRef>
+          <a:fillRef idx="3">
+            <a:schemeClr val="accent1"/>
+          </a:fillRef>
+          <a:effectRef idx="2">
+            <a:schemeClr val="accent1"/>
+          </a:effectRef>
+          <a:fontRef idx="minor">
+            <a:schemeClr val="lt1"/>
+          </a:fontRef>
+        </p:style>
+        <p:txBody>
+          <a:bodyPr rtlCol="0" anchor="ctr"/>
+          <a:lstStyle/>
+          <a:p>
+            <a:pPr algn="ctr"/>
+          </a:p>
+        </p:txBody>
+      </p:sp>
+      <p:sp>
+        <p:nvSpPr>
+          <p:cNvPr id="4" name="TextBox 3"/>
           <p:cNvSpPr txBox="1"/>
           <p:nvPr/>
         </p:nvSpPr>
         <p:spPr>
           <a:xfrm>
-            <a:off x="914400" y="2011680"/>
-            <a:ext cx="10332720" cy="1783080"/>
+            <a:off x="1188720" y="2103120"/>
+            <a:ext cx="9784080" cy="1783080"/>
           </a:xfrm>
           <a:prstGeom prst="rect">
             <a:avLst/>
@@ -3165,7 +3209,7 @@
                 <a:solidFill>
                   <a:srgbClr val="FFFFFF"/>
                 </a:solidFill>
-                <a:latin typeface="Constantia"/>
+                <a:latin typeface="Georgia"/>
               </a:rPr>
               <a:t>Smart Building Energy Monitoring</a:t>
             </a:r>
@@ -3174,13 +3218,13 @@
       </p:sp>
       <p:sp>
         <p:nvSpPr>
-          <p:cNvPr id="4" name="TextBox 3"/>
+          <p:cNvPr id="5" name="TextBox 4"/>
           <p:cNvSpPr txBox="1"/>
           <p:nvPr/>
         </p:nvSpPr>
         <p:spPr>
           <a:xfrm>
-            <a:off x="1371600" y="3840480"/>
+            <a:off x="1371600" y="3931920"/>
             <a:ext cx="9418320" cy="548640"/>
           </a:xfrm>
           <a:prstGeom prst="rect">
@@ -3196,11 +3240,11 @@
           <a:p>
             <a:pPr algn="ctr"/>
             <a:r>
-              <a:rPr sz="1800" b="0" i="1">
-                <a:solidFill>
-                  <a:srgbClr val="D5CCE2"/>
-                </a:solidFill>
-                <a:latin typeface="Georgia"/>
+              <a:rPr sz="1700" b="0" i="1">
+                <a:solidFill>
+                  <a:srgbClr val="CCDAD0"/>
+                </a:solidFill>
+                <a:latin typeface="Cambria"/>
               </a:rPr>
               <a:t>Live per-floor energy, air-quality and water insight from a fog and edge pipeline</a:t>
             </a:r>
@@ -3209,14 +3253,14 @@
       </p:sp>
       <p:sp>
         <p:nvSpPr>
-          <p:cNvPr id="5" name="TextBox 4"/>
+          <p:cNvPr id="6" name="TextBox 5"/>
           <p:cNvSpPr txBox="1"/>
           <p:nvPr/>
         </p:nvSpPr>
         <p:spPr>
           <a:xfrm>
-            <a:off x="1371600" y="4709160"/>
-            <a:ext cx="9418320" cy="1463040"/>
+            <a:off x="1371600" y="4800600"/>
+            <a:ext cx="9418320" cy="1280160"/>
           </a:xfrm>
           <a:prstGeom prst="rect">
             <a:avLst/>
@@ -3233,9 +3277,9 @@
             <a:r>
               <a:rPr sz="1250" b="0" i="0">
                 <a:solidFill>
-                  <a:srgbClr val="C6BAD8"/>
-                </a:solidFill>
-                <a:latin typeface="Georgia"/>
+                  <a:srgbClr val="B6CABC"/>
+                </a:solidFill>
+                <a:latin typeface="Cambria"/>
               </a:rPr>
               <a:t>MSc in Cloud Computing   ·   Fog and Edge Computing (H9FECC)</a:t>
             </a:r>
@@ -3245,9 +3289,9 @@
             <a:r>
               <a:rPr sz="1250" b="0" i="0">
                 <a:solidFill>
-                  <a:srgbClr val="C6BAD8"/>
-                </a:solidFill>
-                <a:latin typeface="Georgia"/>
+                  <a:srgbClr val="B6CABC"/>
+                </a:solidFill>
+                <a:latin typeface="Cambria"/>
               </a:rPr>
               <a:t>National College of Ireland</a:t>
             </a:r>
@@ -3274,204 +3318,66 @@
       <p:grpSpPr/>
       <p:sp>
         <p:nvSpPr>
-          <p:cNvPr id="2" name="Title 1"/>
-          <p:cNvSpPr>
-            <a:spLocks noGrp="1"/>
-          </p:cNvSpPr>
-          <p:nvPr>
-            <p:ph type="title"/>
-          </p:nvPr>
+          <p:cNvPr id="4" name="Rounded Rectangle 3"/>
+          <p:cNvSpPr/>
+          <p:nvPr/>
         </p:nvSpPr>
         <p:spPr>
           <a:xfrm>
-            <a:off x="713232" y="777240"/>
-            <a:ext cx="10607040" cy="868680"/>
+            <a:off x="502920" y="457200"/>
+            <a:ext cx="11183112" cy="5943600"/>
           </a:xfrm>
+          <a:prstGeom prst="roundRect">
+            <a:avLst/>
+          </a:prstGeom>
+          <a:solidFill>
+            <a:srgbClr val="E9EFEB"/>
+          </a:solidFill>
+          <a:ln w="15240">
+            <a:solidFill>
+              <a:srgbClr val="4A7C59"/>
+            </a:solidFill>
+          </a:ln>
+          <a:effectLst/>
         </p:spPr>
-        <p:txBody>
-          <a:bodyPr wrap="square" anchor="t"/>
-          <a:lstStyle/>
-          <a:p>
-            <a:pPr algn="l"/>
-            <a:r>
-              <a:rPr b="1" sz="2700">
-                <a:solidFill>
-                  <a:srgbClr val="6A4A9A"/>
-                </a:solidFill>
-                <a:latin typeface="Constantia"/>
-              </a:rPr>
-              <a:t>Why periodic checks fail here</a:t>
-            </a:r>
-          </a:p>
-        </p:txBody>
-      </p:sp>
-      <p:sp>
-        <p:nvSpPr>
-          <p:cNvPr id="3" name="Content Placeholder 2"/>
-          <p:cNvSpPr>
-            <a:spLocks noGrp="1"/>
-          </p:cNvSpPr>
-          <p:nvPr>
-            <p:ph idx="1"/>
-          </p:nvPr>
+        <p:style>
+          <a:lnRef idx="1">
+            <a:schemeClr val="accent1"/>
+          </a:lnRef>
+          <a:fillRef idx="3">
+            <a:schemeClr val="accent1"/>
+          </a:fillRef>
+          <a:effectRef idx="2">
+            <a:schemeClr val="accent1"/>
+          </a:effectRef>
+          <a:fontRef idx="minor">
+            <a:schemeClr val="lt1"/>
+          </a:fontRef>
+        </p:style>
+        <p:txBody>
+          <a:bodyPr rtlCol="0" anchor="ctr"/>
+          <a:lstStyle/>
+          <a:p>
+            <a:pPr algn="ctr"/>
+          </a:p>
+        </p:txBody>
+      </p:sp>
+      <p:sp>
+        <p:nvSpPr>
+          <p:cNvPr id="5" name="Rectangle 4"/>
+          <p:cNvSpPr/>
+          <p:nvPr/>
         </p:nvSpPr>
         <p:spPr>
           <a:xfrm>
-            <a:off x="713232" y="1828800"/>
-            <a:ext cx="10698480" cy="4526280"/>
-          </a:xfrm>
-        </p:spPr>
-        <p:txBody>
-          <a:bodyPr wrap="square">
-            <a:normAutofit/>
-          </a:bodyPr>
-          <a:lstStyle/>
-          <a:p>
-            <a:pPr>
-              <a:spcAft>
-                <a:spcPts val="600"/>
-              </a:spcAft>
-            </a:pPr>
-            <a:r>
-              <a:rPr sz="1500" b="0">
-                <a:solidFill>
-                  <a:srgbClr val="232A26"/>
-                </a:solidFill>
-                <a:latin typeface="Georgia"/>
-              </a:rPr>
-              <a:t>A monthly bill is one number: it says nothing about which floor, which hour or which system is wasting energy.</a:t>
-            </a:r>
-          </a:p>
-          <a:p>
-            <a:pPr>
-              <a:spcAft>
-                <a:spcPts val="600"/>
-              </a:spcAft>
-            </a:pPr>
-            <a:r>
-              <a:rPr sz="1500" b="0">
-                <a:solidFill>
-                  <a:srgbClr val="232A26"/>
-                </a:solidFill>
-                <a:latin typeface="Georgia"/>
-              </a:rPr>
-              <a:t>The costly events are transient: a packed meeting room pushes CO2 past safe levels in minutes, and by the next walkthrough the evidence is gone.</a:t>
-            </a:r>
-          </a:p>
-          <a:p>
-            <a:pPr>
-              <a:spcAft>
-                <a:spcPts val="600"/>
-              </a:spcAft>
-            </a:pPr>
-            <a:r>
-              <a:rPr sz="1500" b="0">
-                <a:solidFill>
-                  <a:srgbClr val="232A26"/>
-                </a:solidFill>
-                <a:latin typeface="Georgia"/>
-              </a:rPr>
-              <a:t>Leaks run between inspections: a pipe flowing all weekend stays invisible until someone reads a meter on Monday.</a:t>
-            </a:r>
-          </a:p>
-          <a:p>
-            <a:pPr>
-              <a:spcAft>
-                <a:spcPts val="600"/>
-              </a:spcAft>
-            </a:pPr>
-            <a:r>
-              <a:rPr sz="1500" b="1">
-                <a:solidFill>
-                  <a:srgbClr val="6A4A9A"/>
-                </a:solidFill>
-                <a:latin typeface="Georgia"/>
-              </a:rPr>
-              <a:t>This pipeline samples every floor every 2 to 5 seconds, so none of these stay hidden.</a:t>
-            </a:r>
-          </a:p>
-          <a:p>
-            <a:pPr>
-              <a:spcAft>
-                <a:spcPts val="600"/>
-              </a:spcAft>
-            </a:pPr>
-            <a:r>
-              <a:rPr sz="1500" b="1">
-                <a:solidFill>
-                  <a:srgbClr val="6A4A9A"/>
-                </a:solidFill>
-                <a:latin typeface="Georgia"/>
-              </a:rPr>
-              <a:t>Thresholds the pipeline enforces:</a:t>
-            </a:r>
-          </a:p>
-          <a:p>
-            <a:pPr lvl="1">
-              <a:spcAft>
-                <a:spcPts val="600"/>
-              </a:spcAft>
-            </a:pPr>
-            <a:r>
-              <a:rPr sz="1300" b="0">
-                <a:solidFill>
-                  <a:srgbClr val="232A26"/>
-                </a:solidFill>
-                <a:latin typeface="Georgia"/>
-              </a:rPr>
-              <a:t>55 kW: the floor average that raises a peak-load warning in this system.</a:t>
-            </a:r>
-          </a:p>
-          <a:p>
-            <a:pPr lvl="1">
-              <a:spcAft>
-                <a:spcPts val="600"/>
-              </a:spcAft>
-            </a:pPr>
-            <a:r>
-              <a:rPr sz="1300" b="0">
-                <a:solidFill>
-                  <a:srgbClr val="232A26"/>
-                </a:solidFill>
-                <a:latin typeface="Georgia"/>
-              </a:rPr>
-              <a:t>1,000 ppm: the CO2 level the pipeline flags as poor air quality.</a:t>
-            </a:r>
-          </a:p>
-          <a:p>
-            <a:pPr lvl="1">
-              <a:spcAft>
-                <a:spcPts val="600"/>
-              </a:spcAft>
-            </a:pPr>
-            <a:r>
-              <a:rPr sz="1300" b="0">
-                <a:solidFill>
-                  <a:srgbClr val="232A26"/>
-                </a:solidFill>
-                <a:latin typeface="Georgia"/>
-              </a:rPr>
-              <a:t>20 L/min: the sustained water flow treated as a suspected leak.</a:t>
-            </a:r>
-          </a:p>
-        </p:txBody>
-      </p:sp>
-      <p:sp>
-        <p:nvSpPr>
-          <p:cNvPr id="4" name="Rectangle 3"/>
-          <p:cNvSpPr/>
-          <p:nvPr/>
-        </p:nvSpPr>
-        <p:spPr>
-          <a:xfrm>
-            <a:off x="457200" y="457200"/>
-            <a:ext cx="3017520" cy="118872"/>
+            <a:off x="502920" y="457200"/>
+            <a:ext cx="11183112" cy="640080"/>
           </a:xfrm>
           <a:prstGeom prst="rect">
             <a:avLst/>
           </a:prstGeom>
           <a:solidFill>
-            <a:srgbClr val="6A4A9A"/>
+            <a:srgbClr val="4A7C59"/>
           </a:solidFill>
           <a:ln>
             <a:noFill/>
@@ -3502,20 +3408,268 @@
       </p:sp>
       <p:sp>
         <p:nvSpPr>
+          <p:cNvPr id="2" name="Title 1"/>
+          <p:cNvSpPr>
+            <a:spLocks noGrp="1"/>
+          </p:cNvSpPr>
+          <p:nvPr>
+            <p:ph type="title"/>
+          </p:nvPr>
+        </p:nvSpPr>
+        <p:spPr>
+          <a:xfrm>
+            <a:off x="822960" y="457200"/>
+            <a:ext cx="10515600" cy="640080"/>
+          </a:xfrm>
+        </p:spPr>
+        <p:txBody>
+          <a:bodyPr wrap="square" anchor="ctr"/>
+          <a:lstStyle/>
+          <a:p>
+            <a:pPr algn="l"/>
+            <a:r>
+              <a:rPr b="1" sz="2200">
+                <a:solidFill>
+                  <a:srgbClr val="FFFFFF"/>
+                </a:solidFill>
+                <a:latin typeface="Georgia"/>
+              </a:rPr>
+              <a:t>Why periodic checks fail here</a:t>
+            </a:r>
+          </a:p>
+        </p:txBody>
+      </p:sp>
+      <p:sp>
+        <p:nvSpPr>
+          <p:cNvPr id="3" name="Content Placeholder 2"/>
+          <p:cNvSpPr>
+            <a:spLocks noGrp="1"/>
+          </p:cNvSpPr>
+          <p:nvPr>
+            <p:ph idx="1"/>
+          </p:nvPr>
+        </p:nvSpPr>
+        <p:spPr>
+          <a:xfrm>
+            <a:off x="960120" y="1371600"/>
+            <a:ext cx="10241280" cy="4754880"/>
+          </a:xfrm>
+        </p:spPr>
+        <p:txBody>
+          <a:bodyPr wrap="square">
+            <a:normAutofit/>
+          </a:bodyPr>
+          <a:lstStyle/>
+          <a:p>
+            <a:pPr>
+              <a:spcAft>
+                <a:spcPts val="600"/>
+              </a:spcAft>
+            </a:pPr>
+            <a:r>
+              <a:rPr sz="1500" b="0">
+                <a:solidFill>
+                  <a:srgbClr val="232A26"/>
+                </a:solidFill>
+                <a:latin typeface="Cambria"/>
+              </a:rPr>
+              <a:t>A monthly bill is one number: it says nothing about which floor, which hour or which system is wasting energy.</a:t>
+            </a:r>
+          </a:p>
+          <a:p>
+            <a:pPr>
+              <a:spcAft>
+                <a:spcPts val="600"/>
+              </a:spcAft>
+            </a:pPr>
+            <a:r>
+              <a:rPr sz="1500" b="0">
+                <a:solidFill>
+                  <a:srgbClr val="232A26"/>
+                </a:solidFill>
+                <a:latin typeface="Cambria"/>
+              </a:rPr>
+              <a:t>The costly events are transient: a packed meeting room pushes CO2 past safe levels in minutes, and by the next walkthrough the evidence is gone.</a:t>
+            </a:r>
+          </a:p>
+          <a:p>
+            <a:pPr>
+              <a:spcAft>
+                <a:spcPts val="600"/>
+              </a:spcAft>
+            </a:pPr>
+            <a:r>
+              <a:rPr sz="1500" b="0">
+                <a:solidFill>
+                  <a:srgbClr val="232A26"/>
+                </a:solidFill>
+                <a:latin typeface="Cambria"/>
+              </a:rPr>
+              <a:t>Leaks run between inspections: a pipe flowing all weekend stays invisible until someone reads a meter on Monday.</a:t>
+            </a:r>
+          </a:p>
+          <a:p>
+            <a:pPr>
+              <a:spcAft>
+                <a:spcPts val="600"/>
+              </a:spcAft>
+            </a:pPr>
+            <a:r>
+              <a:rPr sz="1500" b="0">
+                <a:solidFill>
+                  <a:srgbClr val="232A26"/>
+                </a:solidFill>
+                <a:latin typeface="Cambria"/>
+              </a:rPr>
+              <a:t>This pipeline samples every floor every 2 to 5 seconds, so none of these stay hidden.</a:t>
+            </a:r>
+          </a:p>
+          <a:p>
+            <a:pPr>
+              <a:spcAft>
+                <a:spcPts val="600"/>
+              </a:spcAft>
+            </a:pPr>
+            <a:r>
+              <a:rPr sz="1500" b="0">
+                <a:solidFill>
+                  <a:srgbClr val="232A26"/>
+                </a:solidFill>
+                <a:latin typeface="Cambria"/>
+              </a:rPr>
+              <a:t>Thresholds the pipeline enforces:</a:t>
+            </a:r>
+          </a:p>
+          <a:p>
+            <a:pPr lvl="1">
+              <a:spcAft>
+                <a:spcPts val="600"/>
+              </a:spcAft>
+            </a:pPr>
+            <a:r>
+              <a:rPr sz="1300" b="0">
+                <a:solidFill>
+                  <a:srgbClr val="232A26"/>
+                </a:solidFill>
+                <a:latin typeface="Cambria"/>
+              </a:rPr>
+              <a:t>55 kW: the floor average that raises a peak-load warning in this system.</a:t>
+            </a:r>
+          </a:p>
+          <a:p>
+            <a:pPr lvl="1">
+              <a:spcAft>
+                <a:spcPts val="600"/>
+              </a:spcAft>
+            </a:pPr>
+            <a:r>
+              <a:rPr sz="1300" b="0">
+                <a:solidFill>
+                  <a:srgbClr val="232A26"/>
+                </a:solidFill>
+                <a:latin typeface="Cambria"/>
+              </a:rPr>
+              <a:t>1,000 ppm: the CO2 level the pipeline flags as poor air quality.</a:t>
+            </a:r>
+          </a:p>
+          <a:p>
+            <a:pPr lvl="1">
+              <a:spcAft>
+                <a:spcPts val="600"/>
+              </a:spcAft>
+            </a:pPr>
+            <a:r>
+              <a:rPr sz="1300" b="0">
+                <a:solidFill>
+                  <a:srgbClr val="232A26"/>
+                </a:solidFill>
+                <a:latin typeface="Cambria"/>
+              </a:rPr>
+              <a:t>20 L/min: the sustained water flow treated as a suspected leak.</a:t>
+            </a:r>
+          </a:p>
+        </p:txBody>
+      </p:sp>
+    </p:spTree>
+  </p:cSld>
+  <p:clrMapOvr>
+    <a:masterClrMapping/>
+  </p:clrMapOvr>
+</p:sld>
+</file>
+
+<file path=ppt/slides/slide3.xml><?xml version="1.0" encoding="utf-8"?>
+<p:sld xmlns:a="http://schemas.openxmlformats.org/drawingml/2006/main" xmlns:p="http://schemas.openxmlformats.org/presentationml/2006/main" xmlns:r="http://schemas.openxmlformats.org/officeDocument/2006/relationships">
+  <p:cSld>
+    <p:spTree>
+      <p:nvGrpSpPr>
+        <p:cNvPr id="1" name=""/>
+        <p:cNvGrpSpPr/>
+        <p:nvPr/>
+      </p:nvGrpSpPr>
+      <p:grpSpPr/>
+      <p:sp>
+        <p:nvSpPr>
+          <p:cNvPr id="4" name="Rounded Rectangle 3"/>
+          <p:cNvSpPr/>
+          <p:nvPr/>
+        </p:nvSpPr>
+        <p:spPr>
+          <a:xfrm>
+            <a:off x="502920" y="457200"/>
+            <a:ext cx="11183112" cy="5943600"/>
+          </a:xfrm>
+          <a:prstGeom prst="roundRect">
+            <a:avLst/>
+          </a:prstGeom>
+          <a:solidFill>
+            <a:srgbClr val="E9EFEB"/>
+          </a:solidFill>
+          <a:ln w="15240">
+            <a:solidFill>
+              <a:srgbClr val="4A7C59"/>
+            </a:solidFill>
+          </a:ln>
+          <a:effectLst/>
+        </p:spPr>
+        <p:style>
+          <a:lnRef idx="1">
+            <a:schemeClr val="accent1"/>
+          </a:lnRef>
+          <a:fillRef idx="3">
+            <a:schemeClr val="accent1"/>
+          </a:fillRef>
+          <a:effectRef idx="2">
+            <a:schemeClr val="accent1"/>
+          </a:effectRef>
+          <a:fontRef idx="minor">
+            <a:schemeClr val="lt1"/>
+          </a:fontRef>
+        </p:style>
+        <p:txBody>
+          <a:bodyPr rtlCol="0" anchor="ctr"/>
+          <a:lstStyle/>
+          <a:p>
+            <a:pPr algn="ctr"/>
+          </a:p>
+        </p:txBody>
+      </p:sp>
+      <p:sp>
+        <p:nvSpPr>
           <p:cNvPr id="5" name="Rectangle 4"/>
           <p:cNvSpPr/>
           <p:nvPr/>
         </p:nvSpPr>
         <p:spPr>
           <a:xfrm>
-            <a:off x="457200" y="457200"/>
-            <a:ext cx="118872" cy="1920240"/>
+            <a:off x="502920" y="457200"/>
+            <a:ext cx="11183112" cy="640080"/>
           </a:xfrm>
           <a:prstGeom prst="rect">
             <a:avLst/>
           </a:prstGeom>
           <a:solidFill>
-            <a:srgbClr val="6A4A9A"/>
+            <a:srgbClr val="4A7C59"/>
           </a:solidFill>
           <a:ln>
             <a:noFill/>
@@ -3544,6 +3698,222 @@
           </a:p>
         </p:txBody>
       </p:sp>
+      <p:sp>
+        <p:nvSpPr>
+          <p:cNvPr id="2" name="Title 1"/>
+          <p:cNvSpPr>
+            <a:spLocks noGrp="1"/>
+          </p:cNvSpPr>
+          <p:nvPr>
+            <p:ph type="title"/>
+          </p:nvPr>
+        </p:nvSpPr>
+        <p:spPr>
+          <a:xfrm>
+            <a:off x="822960" y="457200"/>
+            <a:ext cx="10515600" cy="640080"/>
+          </a:xfrm>
+        </p:spPr>
+        <p:txBody>
+          <a:bodyPr wrap="square" anchor="ctr"/>
+          <a:lstStyle/>
+          <a:p>
+            <a:pPr algn="l"/>
+            <a:r>
+              <a:rPr b="1" sz="2200">
+                <a:solidFill>
+                  <a:srgbClr val="FFFFFF"/>
+                </a:solidFill>
+                <a:latin typeface="Georgia"/>
+              </a:rPr>
+              <a:t>How it works: edge to cloud</a:t>
+            </a:r>
+          </a:p>
+        </p:txBody>
+      </p:sp>
+      <p:sp>
+        <p:nvSpPr>
+          <p:cNvPr id="3" name="Content Placeholder 2"/>
+          <p:cNvSpPr>
+            <a:spLocks noGrp="1"/>
+          </p:cNvSpPr>
+          <p:nvPr>
+            <p:ph idx="1"/>
+          </p:nvPr>
+        </p:nvSpPr>
+        <p:spPr>
+          <a:xfrm>
+            <a:off x="960120" y="1371600"/>
+            <a:ext cx="10241280" cy="4754880"/>
+          </a:xfrm>
+        </p:spPr>
+        <p:txBody>
+          <a:bodyPr wrap="square">
+            <a:normAutofit/>
+          </a:bodyPr>
+          <a:lstStyle/>
+          <a:p>
+            <a:pPr>
+              <a:spcAft>
+                <a:spcPts val="600"/>
+              </a:spcAft>
+            </a:pPr>
+            <a:r>
+              <a:rPr sz="1500" b="0">
+                <a:solidFill>
+                  <a:srgbClr val="232A26"/>
+                </a:solidFill>
+                <a:latin typeface="Cambria"/>
+              </a:rPr>
+              <a:t>Edge:</a:t>
+            </a:r>
+          </a:p>
+          <a:p>
+            <a:pPr lvl="1">
+              <a:spcAft>
+                <a:spcPts val="600"/>
+              </a:spcAft>
+            </a:pPr>
+            <a:r>
+              <a:rPr sz="1300" b="0">
+                <a:solidFill>
+                  <a:srgbClr val="232A26"/>
+                </a:solidFill>
+                <a:latin typeface="Cambria"/>
+              </a:rPr>
+              <a:t>10 sensors, 5 types across 2 office floors, sample every 2 to 5 seconds.</a:t>
+            </a:r>
+          </a:p>
+          <a:p>
+            <a:pPr>
+              <a:spcAft>
+                <a:spcPts val="600"/>
+              </a:spcAft>
+            </a:pPr>
+            <a:r>
+              <a:rPr sz="1500" b="0">
+                <a:solidFill>
+                  <a:srgbClr val="232A26"/>
+                </a:solidFill>
+                <a:latin typeface="Cambria"/>
+              </a:rPr>
+              <a:t>Fog:</a:t>
+            </a:r>
+          </a:p>
+          <a:p>
+            <a:pPr lvl="1">
+              <a:spcAft>
+                <a:spcPts val="600"/>
+              </a:spcAft>
+            </a:pPr>
+            <a:r>
+              <a:rPr sz="1300" b="0">
+                <a:solidFill>
+                  <a:srgbClr val="232A26"/>
+                </a:solidFill>
+                <a:latin typeface="Cambria"/>
+              </a:rPr>
+              <a:t>The fog node reduces each stream to one aggregate per window and raises alerts locally before anything reaches the cloud.</a:t>
+            </a:r>
+          </a:p>
+          <a:p>
+            <a:pPr>
+              <a:spcAft>
+                <a:spcPts val="600"/>
+              </a:spcAft>
+            </a:pPr>
+            <a:r>
+              <a:rPr sz="1500" b="0">
+                <a:solidFill>
+                  <a:srgbClr val="232A26"/>
+                </a:solidFill>
+                <a:latin typeface="Cambria"/>
+              </a:rPr>
+              <a:t>Cloud on AWS:</a:t>
+            </a:r>
+          </a:p>
+          <a:p>
+            <a:pPr lvl="1">
+              <a:spcAft>
+                <a:spcPts val="600"/>
+              </a:spcAft>
+            </a:pPr>
+            <a:r>
+              <a:rPr sz="1300" b="0">
+                <a:solidFill>
+                  <a:srgbClr val="232A26"/>
+                </a:solidFill>
+                <a:latin typeface="Cambria"/>
+              </a:rPr>
+              <a:t>Amazon SQS message queue.</a:t>
+            </a:r>
+          </a:p>
+          <a:p>
+            <a:pPr lvl="1">
+              <a:spcAft>
+                <a:spcPts val="600"/>
+              </a:spcAft>
+            </a:pPr>
+            <a:r>
+              <a:rPr sz="1300" b="0">
+                <a:solidFill>
+                  <a:srgbClr val="232A26"/>
+                </a:solidFill>
+                <a:latin typeface="Cambria"/>
+              </a:rPr>
+              <a:t>AWS Lambda serverless ingest.</a:t>
+            </a:r>
+          </a:p>
+          <a:p>
+            <a:pPr lvl="1">
+              <a:spcAft>
+                <a:spcPts val="600"/>
+              </a:spcAft>
+            </a:pPr>
+            <a:r>
+              <a:rPr sz="1300" b="0">
+                <a:solidFill>
+                  <a:srgbClr val="232A26"/>
+                </a:solidFill>
+                <a:latin typeface="Cambria"/>
+              </a:rPr>
+              <a:t>DynamoDB time-series store.</a:t>
+            </a:r>
+          </a:p>
+          <a:p>
+            <a:pPr lvl="1">
+              <a:spcAft>
+                <a:spcPts val="600"/>
+              </a:spcAft>
+            </a:pPr>
+            <a:r>
+              <a:rPr sz="1300" b="0">
+                <a:solidFill>
+                  <a:srgbClr val="232A26"/>
+                </a:solidFill>
+                <a:latin typeface="Cambria"/>
+              </a:rPr>
+              <a:t>Live dashboard on S3 with API Gateway.</a:t>
+            </a:r>
+          </a:p>
+          <a:p>
+            <a:pPr>
+              <a:spcAft>
+                <a:spcPts val="600"/>
+              </a:spcAft>
+            </a:pPr>
+            <a:r>
+              <a:rPr sz="1500" b="0">
+                <a:solidFill>
+                  <a:srgbClr val="232A26"/>
+                </a:solidFill>
+                <a:latin typeface="Cambria"/>
+              </a:rPr>
+              <a:t>The whole pipeline runs end-to-end on Docker with a local AWS emulator, and deploys to a real AWS account with a single scripted step.</a:t>
+            </a:r>
+          </a:p>
+        </p:txBody>
+      </p:sp>
     </p:spTree>
   </p:cSld>
   <p:clrMapOvr>
@@ -3552,7 +3922,7 @@
 </p:sld>
 </file>
 
-<file path=ppt/slides/slide3.xml><?xml version="1.0" encoding="utf-8"?>
+<file path=ppt/slides/slide4.xml><?xml version="1.0" encoding="utf-8"?>
 <p:sld xmlns:a="http://schemas.openxmlformats.org/drawingml/2006/main" xmlns:p="http://schemas.openxmlformats.org/presentationml/2006/main" xmlns:r="http://schemas.openxmlformats.org/officeDocument/2006/relationships">
   <p:cSld>
     <p:spTree>
@@ -3564,236 +3934,66 @@
       <p:grpSpPr/>
       <p:sp>
         <p:nvSpPr>
-          <p:cNvPr id="2" name="Title 1"/>
-          <p:cNvSpPr>
-            <a:spLocks noGrp="1"/>
-          </p:cNvSpPr>
-          <p:nvPr>
-            <p:ph type="title"/>
-          </p:nvPr>
+          <p:cNvPr id="4" name="Rounded Rectangle 3"/>
+          <p:cNvSpPr/>
+          <p:nvPr/>
         </p:nvSpPr>
         <p:spPr>
           <a:xfrm>
-            <a:off x="713232" y="777240"/>
-            <a:ext cx="10607040" cy="868680"/>
+            <a:off x="502920" y="457200"/>
+            <a:ext cx="11183112" cy="5943600"/>
           </a:xfrm>
+          <a:prstGeom prst="roundRect">
+            <a:avLst/>
+          </a:prstGeom>
+          <a:solidFill>
+            <a:srgbClr val="E9EFEB"/>
+          </a:solidFill>
+          <a:ln w="15240">
+            <a:solidFill>
+              <a:srgbClr val="4A7C59"/>
+            </a:solidFill>
+          </a:ln>
+          <a:effectLst/>
         </p:spPr>
-        <p:txBody>
-          <a:bodyPr wrap="square" anchor="t"/>
-          <a:lstStyle/>
-          <a:p>
-            <a:pPr algn="l"/>
-            <a:r>
-              <a:rPr b="1" sz="2700">
-                <a:solidFill>
-                  <a:srgbClr val="6A4A9A"/>
-                </a:solidFill>
-                <a:latin typeface="Constantia"/>
-              </a:rPr>
-              <a:t>How it works: edge to cloud</a:t>
-            </a:r>
-          </a:p>
-        </p:txBody>
-      </p:sp>
-      <p:sp>
-        <p:nvSpPr>
-          <p:cNvPr id="3" name="Content Placeholder 2"/>
-          <p:cNvSpPr>
-            <a:spLocks noGrp="1"/>
-          </p:cNvSpPr>
-          <p:nvPr>
-            <p:ph idx="1"/>
-          </p:nvPr>
+        <p:style>
+          <a:lnRef idx="1">
+            <a:schemeClr val="accent1"/>
+          </a:lnRef>
+          <a:fillRef idx="3">
+            <a:schemeClr val="accent1"/>
+          </a:fillRef>
+          <a:effectRef idx="2">
+            <a:schemeClr val="accent1"/>
+          </a:effectRef>
+          <a:fontRef idx="minor">
+            <a:schemeClr val="lt1"/>
+          </a:fontRef>
+        </p:style>
+        <p:txBody>
+          <a:bodyPr rtlCol="0" anchor="ctr"/>
+          <a:lstStyle/>
+          <a:p>
+            <a:pPr algn="ctr"/>
+          </a:p>
+        </p:txBody>
+      </p:sp>
+      <p:sp>
+        <p:nvSpPr>
+          <p:cNvPr id="5" name="Rectangle 4"/>
+          <p:cNvSpPr/>
+          <p:nvPr/>
         </p:nvSpPr>
         <p:spPr>
           <a:xfrm>
-            <a:off x="713232" y="1828800"/>
-            <a:ext cx="10698480" cy="4526280"/>
-          </a:xfrm>
-        </p:spPr>
-        <p:txBody>
-          <a:bodyPr wrap="square">
-            <a:normAutofit/>
-          </a:bodyPr>
-          <a:lstStyle/>
-          <a:p>
-            <a:pPr>
-              <a:spcAft>
-                <a:spcPts val="600"/>
-              </a:spcAft>
-            </a:pPr>
-            <a:r>
-              <a:rPr sz="1500" b="1">
-                <a:solidFill>
-                  <a:srgbClr val="6A4A9A"/>
-                </a:solidFill>
-                <a:latin typeface="Georgia"/>
-              </a:rPr>
-              <a:t>Edge:</a:t>
-            </a:r>
-          </a:p>
-          <a:p>
-            <a:pPr lvl="1">
-              <a:spcAft>
-                <a:spcPts val="600"/>
-              </a:spcAft>
-            </a:pPr>
-            <a:r>
-              <a:rPr sz="1300" b="0">
-                <a:solidFill>
-                  <a:srgbClr val="232A26"/>
-                </a:solidFill>
-                <a:latin typeface="Georgia"/>
-              </a:rPr>
-              <a:t>10 sensors, 5 types across 2 office floors, sample every 2 to 5 seconds.</a:t>
-            </a:r>
-          </a:p>
-          <a:p>
-            <a:pPr>
-              <a:spcAft>
-                <a:spcPts val="600"/>
-              </a:spcAft>
-            </a:pPr>
-            <a:r>
-              <a:rPr sz="1500" b="1">
-                <a:solidFill>
-                  <a:srgbClr val="6A4A9A"/>
-                </a:solidFill>
-                <a:latin typeface="Georgia"/>
-              </a:rPr>
-              <a:t>Fog:</a:t>
-            </a:r>
-          </a:p>
-          <a:p>
-            <a:pPr lvl="1">
-              <a:spcAft>
-                <a:spcPts val="600"/>
-              </a:spcAft>
-            </a:pPr>
-            <a:r>
-              <a:rPr sz="1300" b="0">
-                <a:solidFill>
-                  <a:srgbClr val="232A26"/>
-                </a:solidFill>
-                <a:latin typeface="Georgia"/>
-              </a:rPr>
-              <a:t>The fog node reduces each stream to one aggregate per window and raises alerts locally before anything reaches the cloud.</a:t>
-            </a:r>
-          </a:p>
-          <a:p>
-            <a:pPr>
-              <a:spcAft>
-                <a:spcPts val="600"/>
-              </a:spcAft>
-            </a:pPr>
-            <a:r>
-              <a:rPr sz="1500" b="1">
-                <a:solidFill>
-                  <a:srgbClr val="6A4A9A"/>
-                </a:solidFill>
-                <a:latin typeface="Georgia"/>
-              </a:rPr>
-              <a:t>Cloud on AWS:</a:t>
-            </a:r>
-          </a:p>
-          <a:p>
-            <a:pPr lvl="1">
-              <a:spcAft>
-                <a:spcPts val="600"/>
-              </a:spcAft>
-            </a:pPr>
-            <a:r>
-              <a:rPr sz="1300" b="0">
-                <a:solidFill>
-                  <a:srgbClr val="232A26"/>
-                </a:solidFill>
-                <a:latin typeface="Georgia"/>
-              </a:rPr>
-              <a:t>Amazon SQS message queue.</a:t>
-            </a:r>
-          </a:p>
-          <a:p>
-            <a:pPr lvl="1">
-              <a:spcAft>
-                <a:spcPts val="600"/>
-              </a:spcAft>
-            </a:pPr>
-            <a:r>
-              <a:rPr sz="1300" b="0">
-                <a:solidFill>
-                  <a:srgbClr val="232A26"/>
-                </a:solidFill>
-                <a:latin typeface="Georgia"/>
-              </a:rPr>
-              <a:t>AWS Lambda serverless ingest.</a:t>
-            </a:r>
-          </a:p>
-          <a:p>
-            <a:pPr lvl="1">
-              <a:spcAft>
-                <a:spcPts val="600"/>
-              </a:spcAft>
-            </a:pPr>
-            <a:r>
-              <a:rPr sz="1300" b="0">
-                <a:solidFill>
-                  <a:srgbClr val="232A26"/>
-                </a:solidFill>
-                <a:latin typeface="Georgia"/>
-              </a:rPr>
-              <a:t>DynamoDB time-series store.</a:t>
-            </a:r>
-          </a:p>
-          <a:p>
-            <a:pPr lvl="1">
-              <a:spcAft>
-                <a:spcPts val="600"/>
-              </a:spcAft>
-            </a:pPr>
-            <a:r>
-              <a:rPr sz="1300" b="0">
-                <a:solidFill>
-                  <a:srgbClr val="232A26"/>
-                </a:solidFill>
-                <a:latin typeface="Georgia"/>
-              </a:rPr>
-              <a:t>Live dashboard on S3 with API Gateway.</a:t>
-            </a:r>
-          </a:p>
-          <a:p>
-            <a:pPr>
-              <a:spcAft>
-                <a:spcPts val="600"/>
-              </a:spcAft>
-            </a:pPr>
-            <a:r>
-              <a:rPr sz="1500" b="1">
-                <a:solidFill>
-                  <a:srgbClr val="6A4A9A"/>
-                </a:solidFill>
-                <a:latin typeface="Georgia"/>
-              </a:rPr>
-              <a:t>The whole pipeline runs end-to-end on Docker with a local AWS emulator, and deploys to a real AWS account with a single scripted step.</a:t>
-            </a:r>
-          </a:p>
-        </p:txBody>
-      </p:sp>
-      <p:sp>
-        <p:nvSpPr>
-          <p:cNvPr id="4" name="Rectangle 3"/>
-          <p:cNvSpPr/>
-          <p:nvPr/>
-        </p:nvSpPr>
-        <p:spPr>
-          <a:xfrm>
-            <a:off x="457200" y="457200"/>
-            <a:ext cx="3017520" cy="118872"/>
+            <a:off x="502920" y="457200"/>
+            <a:ext cx="11183112" cy="640080"/>
           </a:xfrm>
           <a:prstGeom prst="rect">
             <a:avLst/>
           </a:prstGeom>
           <a:solidFill>
-            <a:srgbClr val="6A4A9A"/>
+            <a:srgbClr val="4A7C59"/>
           </a:solidFill>
           <a:ln>
             <a:noFill/>
@@ -3824,113 +4024,51 @@
       </p:sp>
       <p:sp>
         <p:nvSpPr>
-          <p:cNvPr id="5" name="Rectangle 4"/>
-          <p:cNvSpPr/>
-          <p:nvPr/>
+          <p:cNvPr id="2" name="Title 1"/>
+          <p:cNvSpPr>
+            <a:spLocks noGrp="1"/>
+          </p:cNvSpPr>
+          <p:nvPr>
+            <p:ph type="title"/>
+          </p:nvPr>
         </p:nvSpPr>
         <p:spPr>
           <a:xfrm>
-            <a:off x="457200" y="457200"/>
-            <a:ext cx="118872" cy="1920240"/>
+            <a:off x="822960" y="457200"/>
+            <a:ext cx="10515600" cy="640080"/>
           </a:xfrm>
-          <a:prstGeom prst="rect">
-            <a:avLst/>
-          </a:prstGeom>
-          <a:solidFill>
-            <a:srgbClr val="6A4A9A"/>
-          </a:solidFill>
-          <a:ln>
-            <a:noFill/>
-          </a:ln>
-          <a:effectLst/>
         </p:spPr>
-        <p:style>
-          <a:lnRef idx="1">
-            <a:schemeClr val="accent1"/>
-          </a:lnRef>
-          <a:fillRef idx="3">
-            <a:schemeClr val="accent1"/>
-          </a:fillRef>
-          <a:effectRef idx="2">
-            <a:schemeClr val="accent1"/>
-          </a:effectRef>
-          <a:fontRef idx="minor">
-            <a:schemeClr val="lt1"/>
-          </a:fontRef>
-        </p:style>
-        <p:txBody>
-          <a:bodyPr rtlCol="0" anchor="ctr"/>
-          <a:lstStyle/>
-          <a:p>
-            <a:pPr algn="ctr"/>
-          </a:p>
-        </p:txBody>
-      </p:sp>
-    </p:spTree>
-  </p:cSld>
-  <p:clrMapOvr>
-    <a:masterClrMapping/>
-  </p:clrMapOvr>
-</p:sld>
-</file>
-
-<file path=ppt/slides/slide4.xml><?xml version="1.0" encoding="utf-8"?>
-<p:sld xmlns:a="http://schemas.openxmlformats.org/drawingml/2006/main" xmlns:p="http://schemas.openxmlformats.org/presentationml/2006/main" xmlns:r="http://schemas.openxmlformats.org/officeDocument/2006/relationships">
-  <p:cSld>
-    <p:spTree>
-      <p:nvGrpSpPr>
-        <p:cNvPr id="1" name=""/>
-        <p:cNvGrpSpPr/>
-        <p:nvPr/>
-      </p:nvGrpSpPr>
-      <p:grpSpPr/>
-      <p:sp>
-        <p:nvSpPr>
-          <p:cNvPr id="2" name="Title 1"/>
-          <p:cNvSpPr>
-            <a:spLocks noGrp="1"/>
-          </p:cNvSpPr>
-          <p:nvPr>
-            <p:ph type="title"/>
+        <p:txBody>
+          <a:bodyPr wrap="square" anchor="ctr"/>
+          <a:lstStyle/>
+          <a:p>
+            <a:pPr algn="l"/>
+            <a:r>
+              <a:rPr b="1" sz="2200">
+                <a:solidFill>
+                  <a:srgbClr val="FFFFFF"/>
+                </a:solidFill>
+                <a:latin typeface="Georgia"/>
+              </a:rPr>
+              <a:t>Demonstration highlights</a:t>
+            </a:r>
+          </a:p>
+        </p:txBody>
+      </p:sp>
+      <p:sp>
+        <p:nvSpPr>
+          <p:cNvPr id="3" name="Content Placeholder 2"/>
+          <p:cNvSpPr>
+            <a:spLocks noGrp="1"/>
+          </p:cNvSpPr>
+          <p:nvPr>
+            <p:ph idx="1"/>
           </p:nvPr>
         </p:nvSpPr>
         <p:spPr>
           <a:xfrm>
-            <a:off x="713232" y="777240"/>
-            <a:ext cx="10607040" cy="868680"/>
-          </a:xfrm>
-        </p:spPr>
-        <p:txBody>
-          <a:bodyPr wrap="square" anchor="t"/>
-          <a:lstStyle/>
-          <a:p>
-            <a:pPr algn="l"/>
-            <a:r>
-              <a:rPr b="1" sz="2700">
-                <a:solidFill>
-                  <a:srgbClr val="6A4A9A"/>
-                </a:solidFill>
-                <a:latin typeface="Constantia"/>
-              </a:rPr>
-              <a:t>Demonstration highlights</a:t>
-            </a:r>
-          </a:p>
-        </p:txBody>
-      </p:sp>
-      <p:sp>
-        <p:nvSpPr>
-          <p:cNvPr id="3" name="Content Placeholder 2"/>
-          <p:cNvSpPr>
-            <a:spLocks noGrp="1"/>
-          </p:cNvSpPr>
-          <p:nvPr>
-            <p:ph idx="1"/>
-          </p:nvPr>
-        </p:nvSpPr>
-        <p:spPr>
-          <a:xfrm>
-            <a:off x="713232" y="1828800"/>
-            <a:ext cx="5715000" cy="4434840"/>
+            <a:off x="960120" y="1371600"/>
+            <a:ext cx="5394960" cy="4754880"/>
           </a:xfrm>
         </p:spPr>
         <p:txBody>
@@ -3945,11 +4083,11 @@
               </a:spcAft>
             </a:pPr>
             <a:r>
-              <a:rPr sz="1500" b="1">
-                <a:solidFill>
-                  <a:srgbClr val="6A4A9A"/>
-                </a:solidFill>
-                <a:latin typeface="Georgia"/>
+              <a:rPr sz="1500" b="0">
+                <a:solidFill>
+                  <a:srgbClr val="232A26"/>
+                </a:solidFill>
+                <a:latin typeface="Cambria"/>
               </a:rPr>
               <a:t>Captured from the running stack: both floors grading A, with every health check green.</a:t>
             </a:r>
@@ -3965,7 +4103,7 @@
                 <a:solidFill>
                   <a:srgbClr val="232A26"/>
                 </a:solidFill>
-                <a:latin typeface="Georgia"/>
+                <a:latin typeface="Cambria"/>
               </a:rPr>
               <a:t>4 / 4 pipeline health checks green: gateway, queue, processor and pipeline.</a:t>
             </a:r>
@@ -3981,7 +4119,7 @@
                 <a:solidFill>
                   <a:srgbClr val="232A26"/>
                 </a:solidFill>
-                <a:latin typeface="Georgia"/>
+                <a:latin typeface="Cambria"/>
               </a:rPr>
               <a:t>129 automated tests pass, covering window math, alert rules and real HTTP handling.</a:t>
             </a:r>
@@ -3997,98 +4135,10 @@
                 <a:solidFill>
                   <a:srgbClr val="232A26"/>
                 </a:solidFill>
-                <a:latin typeface="Georgia"/>
+                <a:latin typeface="Cambria"/>
               </a:rPr>
               <a:t>2,000 message burst absorbed by the queue and drained in the load test.</a:t>
             </a:r>
-          </a:p>
-        </p:txBody>
-      </p:sp>
-      <p:sp>
-        <p:nvSpPr>
-          <p:cNvPr id="4" name="Rectangle 3"/>
-          <p:cNvSpPr/>
-          <p:nvPr/>
-        </p:nvSpPr>
-        <p:spPr>
-          <a:xfrm>
-            <a:off x="457200" y="457200"/>
-            <a:ext cx="3017520" cy="118872"/>
-          </a:xfrm>
-          <a:prstGeom prst="rect">
-            <a:avLst/>
-          </a:prstGeom>
-          <a:solidFill>
-            <a:srgbClr val="6A4A9A"/>
-          </a:solidFill>
-          <a:ln>
-            <a:noFill/>
-          </a:ln>
-          <a:effectLst/>
-        </p:spPr>
-        <p:style>
-          <a:lnRef idx="1">
-            <a:schemeClr val="accent1"/>
-          </a:lnRef>
-          <a:fillRef idx="3">
-            <a:schemeClr val="accent1"/>
-          </a:fillRef>
-          <a:effectRef idx="2">
-            <a:schemeClr val="accent1"/>
-          </a:effectRef>
-          <a:fontRef idx="minor">
-            <a:schemeClr val="lt1"/>
-          </a:fontRef>
-        </p:style>
-        <p:txBody>
-          <a:bodyPr rtlCol="0" anchor="ctr"/>
-          <a:lstStyle/>
-          <a:p>
-            <a:pPr algn="ctr"/>
-          </a:p>
-        </p:txBody>
-      </p:sp>
-      <p:sp>
-        <p:nvSpPr>
-          <p:cNvPr id="5" name="Rectangle 4"/>
-          <p:cNvSpPr/>
-          <p:nvPr/>
-        </p:nvSpPr>
-        <p:spPr>
-          <a:xfrm>
-            <a:off x="457200" y="457200"/>
-            <a:ext cx="118872" cy="1920240"/>
-          </a:xfrm>
-          <a:prstGeom prst="rect">
-            <a:avLst/>
-          </a:prstGeom>
-          <a:solidFill>
-            <a:srgbClr val="6A4A9A"/>
-          </a:solidFill>
-          <a:ln>
-            <a:noFill/>
-          </a:ln>
-          <a:effectLst/>
-        </p:spPr>
-        <p:style>
-          <a:lnRef idx="1">
-            <a:schemeClr val="accent1"/>
-          </a:lnRef>
-          <a:fillRef idx="3">
-            <a:schemeClr val="accent1"/>
-          </a:fillRef>
-          <a:effectRef idx="2">
-            <a:schemeClr val="accent1"/>
-          </a:effectRef>
-          <a:fontRef idx="minor">
-            <a:schemeClr val="lt1"/>
-          </a:fontRef>
-        </p:style>
-        <p:txBody>
-          <a:bodyPr rtlCol="0" anchor="ctr"/>
-          <a:lstStyle/>
-          <a:p>
-            <a:pPr algn="ctr"/>
           </a:p>
         </p:txBody>
       </p:sp>
@@ -4108,8 +4158,8 @@
         </p:blipFill>
         <p:spPr>
           <a:xfrm>
-            <a:off x="7233346" y="1874519"/>
-            <a:ext cx="3775587" cy="4206240"/>
+            <a:off x="6858769" y="1463040"/>
+            <a:ext cx="4021821" cy="4480560"/>
           </a:xfrm>
           <a:prstGeom prst="rect">
             <a:avLst/>
@@ -4136,204 +4186,66 @@
       <p:grpSpPr/>
       <p:sp>
         <p:nvSpPr>
-          <p:cNvPr id="2" name="Title 1"/>
-          <p:cNvSpPr>
-            <a:spLocks noGrp="1"/>
-          </p:cNvSpPr>
-          <p:nvPr>
-            <p:ph type="title"/>
-          </p:nvPr>
+          <p:cNvPr id="4" name="Rounded Rectangle 3"/>
+          <p:cNvSpPr/>
+          <p:nvPr/>
         </p:nvSpPr>
         <p:spPr>
           <a:xfrm>
-            <a:off x="713232" y="777240"/>
-            <a:ext cx="10607040" cy="868680"/>
+            <a:off x="502920" y="457200"/>
+            <a:ext cx="11183112" cy="5943600"/>
           </a:xfrm>
+          <a:prstGeom prst="roundRect">
+            <a:avLst/>
+          </a:prstGeom>
+          <a:solidFill>
+            <a:srgbClr val="E9EFEB"/>
+          </a:solidFill>
+          <a:ln w="15240">
+            <a:solidFill>
+              <a:srgbClr val="4A7C59"/>
+            </a:solidFill>
+          </a:ln>
+          <a:effectLst/>
         </p:spPr>
-        <p:txBody>
-          <a:bodyPr wrap="square" anchor="t"/>
-          <a:lstStyle/>
-          <a:p>
-            <a:pPr algn="l"/>
-            <a:r>
-              <a:rPr b="1" sz="2700">
-                <a:solidFill>
-                  <a:srgbClr val="6A4A9A"/>
-                </a:solidFill>
-                <a:latin typeface="Constantia"/>
-              </a:rPr>
-              <a:t>Hardest part: ten threads, one buffer</a:t>
-            </a:r>
-          </a:p>
-        </p:txBody>
-      </p:sp>
-      <p:sp>
-        <p:nvSpPr>
-          <p:cNvPr id="3" name="Content Placeholder 2"/>
-          <p:cNvSpPr>
-            <a:spLocks noGrp="1"/>
-          </p:cNvSpPr>
-          <p:nvPr>
-            <p:ph idx="1"/>
-          </p:nvPr>
+        <p:style>
+          <a:lnRef idx="1">
+            <a:schemeClr val="accent1"/>
+          </a:lnRef>
+          <a:fillRef idx="3">
+            <a:schemeClr val="accent1"/>
+          </a:fillRef>
+          <a:effectRef idx="2">
+            <a:schemeClr val="accent1"/>
+          </a:effectRef>
+          <a:fontRef idx="minor">
+            <a:schemeClr val="lt1"/>
+          </a:fontRef>
+        </p:style>
+        <p:txBody>
+          <a:bodyPr rtlCol="0" anchor="ctr"/>
+          <a:lstStyle/>
+          <a:p>
+            <a:pPr algn="ctr"/>
+          </a:p>
+        </p:txBody>
+      </p:sp>
+      <p:sp>
+        <p:nvSpPr>
+          <p:cNvPr id="5" name="Rectangle 4"/>
+          <p:cNvSpPr/>
+          <p:nvPr/>
         </p:nvSpPr>
         <p:spPr>
           <a:xfrm>
-            <a:off x="713232" y="1828800"/>
-            <a:ext cx="10698480" cy="4526280"/>
-          </a:xfrm>
-        </p:spPr>
-        <p:txBody>
-          <a:bodyPr wrap="square">
-            <a:normAutofit/>
-          </a:bodyPr>
-          <a:lstStyle/>
-          <a:p>
-            <a:pPr>
-              <a:spcAft>
-                <a:spcPts val="600"/>
-              </a:spcAft>
-            </a:pPr>
-            <a:r>
-              <a:rPr sz="1500" b="1">
-                <a:solidFill>
-                  <a:srgbClr val="6A4A9A"/>
-                </a:solidFill>
-                <a:latin typeface="Georgia"/>
-              </a:rPr>
-              <a:t>The problem:</a:t>
-            </a:r>
-          </a:p>
-          <a:p>
-            <a:pPr lvl="1">
-              <a:spcAft>
-                <a:spcPts val="600"/>
-              </a:spcAft>
-            </a:pPr>
-            <a:r>
-              <a:rPr sz="1300" b="0">
-                <a:solidFill>
-                  <a:srgbClr val="232A26"/>
-                </a:solidFill>
-                <a:latin typeface="Georgia"/>
-              </a:rPr>
-              <a:t>Every incoming sensor batch runs on its own operating-system thread, and they all need to update the same in-memory window buffers.</a:t>
-            </a:r>
-          </a:p>
-          <a:p>
-            <a:pPr>
-              <a:spcAft>
-                <a:spcPts val="600"/>
-              </a:spcAft>
-            </a:pPr>
-            <a:r>
-              <a:rPr sz="1500" b="1">
-                <a:solidFill>
-                  <a:srgbClr val="6A4A9A"/>
-                </a:solidFill>
-                <a:latin typeface="Georgia"/>
-              </a:rPr>
-              <a:t>Why it was hard:</a:t>
-            </a:r>
-          </a:p>
-          <a:p>
-            <a:pPr lvl="1">
-              <a:spcAft>
-                <a:spcPts val="600"/>
-              </a:spcAft>
-            </a:pPr>
-            <a:r>
-              <a:rPr sz="1300" b="0">
-                <a:solidFill>
-                  <a:srgbClr val="232A26"/>
-                </a:solidFill>
-                <a:latin typeface="Georgia"/>
-              </a:rPr>
-              <a:t>A buffer race throws no error; light testing looks perfect, and only under concurrent load do aggregates and alerts go quietly wrong, never reproducibly.</a:t>
-            </a:r>
-          </a:p>
-          <a:p>
-            <a:pPr>
-              <a:spcAft>
-                <a:spcPts val="600"/>
-              </a:spcAft>
-            </a:pPr>
-            <a:r>
-              <a:rPr sz="1500" b="1">
-                <a:solidFill>
-                  <a:srgbClr val="6A4A9A"/>
-                </a:solidFill>
-                <a:latin typeface="Georgia"/>
-              </a:rPr>
-              <a:t>The fix:</a:t>
-            </a:r>
-          </a:p>
-          <a:p>
-            <a:pPr lvl="1">
-              <a:spcAft>
-                <a:spcPts val="600"/>
-              </a:spcAft>
-            </a:pPr>
-            <a:r>
-              <a:rPr sz="1300" b="0">
-                <a:solidFill>
-                  <a:srgbClr val="232A26"/>
-                </a:solidFill>
-                <a:latin typeface="Georgia"/>
-              </a:rPr>
-              <a:t>A single-writer design: request threads only place batches on a thread-safe hand-off queue, and one background thread is the only code that touches the buffers.</a:t>
-            </a:r>
-          </a:p>
-          <a:p>
-            <a:pPr lvl="1">
-              <a:spcAft>
-                <a:spcPts val="600"/>
-              </a:spcAft>
-            </a:pPr>
-            <a:r>
-              <a:rPr sz="1300" b="0">
-                <a:solidFill>
-                  <a:srgbClr val="232A26"/>
-                </a:solidFill>
-                <a:latin typeface="Georgia"/>
-              </a:rPr>
-              <a:t>The hand-off queue is the one door into shared state, so a single writer thread is all that ever touches the window buffers.</a:t>
-            </a:r>
-          </a:p>
-          <a:p>
-            <a:pPr lvl="1">
-              <a:spcAft>
-                <a:spcPts val="600"/>
-              </a:spcAft>
-            </a:pPr>
-            <a:r>
-              <a:rPr sz="1300" b="0">
-                <a:solidFill>
-                  <a:srgbClr val="232A26"/>
-                </a:solidFill>
-                <a:latin typeface="Georgia"/>
-              </a:rPr>
-              <a:t>Real HTTP tests boot the actual server to prove it.</a:t>
-            </a:r>
-          </a:p>
-        </p:txBody>
-      </p:sp>
-      <p:sp>
-        <p:nvSpPr>
-          <p:cNvPr id="4" name="Rectangle 3"/>
-          <p:cNvSpPr/>
-          <p:nvPr/>
-        </p:nvSpPr>
-        <p:spPr>
-          <a:xfrm>
-            <a:off x="457200" y="457200"/>
-            <a:ext cx="3017520" cy="118872"/>
+            <a:off x="502920" y="457200"/>
+            <a:ext cx="11183112" cy="640080"/>
           </a:xfrm>
           <a:prstGeom prst="rect">
             <a:avLst/>
           </a:prstGeom>
           <a:solidFill>
-            <a:srgbClr val="6A4A9A"/>
+            <a:srgbClr val="4A7C59"/>
           </a:solidFill>
           <a:ln>
             <a:noFill/>
@@ -4364,20 +4276,268 @@
       </p:sp>
       <p:sp>
         <p:nvSpPr>
+          <p:cNvPr id="2" name="Title 1"/>
+          <p:cNvSpPr>
+            <a:spLocks noGrp="1"/>
+          </p:cNvSpPr>
+          <p:nvPr>
+            <p:ph type="title"/>
+          </p:nvPr>
+        </p:nvSpPr>
+        <p:spPr>
+          <a:xfrm>
+            <a:off x="822960" y="457200"/>
+            <a:ext cx="10515600" cy="640080"/>
+          </a:xfrm>
+        </p:spPr>
+        <p:txBody>
+          <a:bodyPr wrap="square" anchor="ctr"/>
+          <a:lstStyle/>
+          <a:p>
+            <a:pPr algn="l"/>
+            <a:r>
+              <a:rPr b="1" sz="2200">
+                <a:solidFill>
+                  <a:srgbClr val="FFFFFF"/>
+                </a:solidFill>
+                <a:latin typeface="Georgia"/>
+              </a:rPr>
+              <a:t>Hardest part: ten threads, one buffer</a:t>
+            </a:r>
+          </a:p>
+        </p:txBody>
+      </p:sp>
+      <p:sp>
+        <p:nvSpPr>
+          <p:cNvPr id="3" name="Content Placeholder 2"/>
+          <p:cNvSpPr>
+            <a:spLocks noGrp="1"/>
+          </p:cNvSpPr>
+          <p:nvPr>
+            <p:ph idx="1"/>
+          </p:nvPr>
+        </p:nvSpPr>
+        <p:spPr>
+          <a:xfrm>
+            <a:off x="960120" y="1371600"/>
+            <a:ext cx="10241280" cy="4754880"/>
+          </a:xfrm>
+        </p:spPr>
+        <p:txBody>
+          <a:bodyPr wrap="square">
+            <a:normAutofit/>
+          </a:bodyPr>
+          <a:lstStyle/>
+          <a:p>
+            <a:pPr>
+              <a:spcAft>
+                <a:spcPts val="600"/>
+              </a:spcAft>
+            </a:pPr>
+            <a:r>
+              <a:rPr sz="1500" b="0">
+                <a:solidFill>
+                  <a:srgbClr val="232A26"/>
+                </a:solidFill>
+                <a:latin typeface="Cambria"/>
+              </a:rPr>
+              <a:t>The problem:</a:t>
+            </a:r>
+          </a:p>
+          <a:p>
+            <a:pPr lvl="1">
+              <a:spcAft>
+                <a:spcPts val="600"/>
+              </a:spcAft>
+            </a:pPr>
+            <a:r>
+              <a:rPr sz="1300" b="0">
+                <a:solidFill>
+                  <a:srgbClr val="232A26"/>
+                </a:solidFill>
+                <a:latin typeface="Cambria"/>
+              </a:rPr>
+              <a:t>Every incoming sensor batch runs on its own operating-system thread, and they all need to update the same in-memory window buffers.</a:t>
+            </a:r>
+          </a:p>
+          <a:p>
+            <a:pPr>
+              <a:spcAft>
+                <a:spcPts val="600"/>
+              </a:spcAft>
+            </a:pPr>
+            <a:r>
+              <a:rPr sz="1500" b="0">
+                <a:solidFill>
+                  <a:srgbClr val="232A26"/>
+                </a:solidFill>
+                <a:latin typeface="Cambria"/>
+              </a:rPr>
+              <a:t>Why it was hard:</a:t>
+            </a:r>
+          </a:p>
+          <a:p>
+            <a:pPr lvl="1">
+              <a:spcAft>
+                <a:spcPts val="600"/>
+              </a:spcAft>
+            </a:pPr>
+            <a:r>
+              <a:rPr sz="1300" b="0">
+                <a:solidFill>
+                  <a:srgbClr val="232A26"/>
+                </a:solidFill>
+                <a:latin typeface="Cambria"/>
+              </a:rPr>
+              <a:t>A buffer race throws no error; light testing looks perfect, and only under concurrent load do aggregates and alerts go quietly wrong, never reproducibly.</a:t>
+            </a:r>
+          </a:p>
+          <a:p>
+            <a:pPr>
+              <a:spcAft>
+                <a:spcPts val="600"/>
+              </a:spcAft>
+            </a:pPr>
+            <a:r>
+              <a:rPr sz="1500" b="0">
+                <a:solidFill>
+                  <a:srgbClr val="232A26"/>
+                </a:solidFill>
+                <a:latin typeface="Cambria"/>
+              </a:rPr>
+              <a:t>The fix:</a:t>
+            </a:r>
+          </a:p>
+          <a:p>
+            <a:pPr lvl="1">
+              <a:spcAft>
+                <a:spcPts val="600"/>
+              </a:spcAft>
+            </a:pPr>
+            <a:r>
+              <a:rPr sz="1300" b="0">
+                <a:solidFill>
+                  <a:srgbClr val="232A26"/>
+                </a:solidFill>
+                <a:latin typeface="Cambria"/>
+              </a:rPr>
+              <a:t>A single-writer design: request threads only place batches on a thread-safe hand-off queue, and one background thread is the only code that touches the buffers.</a:t>
+            </a:r>
+          </a:p>
+          <a:p>
+            <a:pPr lvl="1">
+              <a:spcAft>
+                <a:spcPts val="600"/>
+              </a:spcAft>
+            </a:pPr>
+            <a:r>
+              <a:rPr sz="1300" b="0">
+                <a:solidFill>
+                  <a:srgbClr val="232A26"/>
+                </a:solidFill>
+                <a:latin typeface="Cambria"/>
+              </a:rPr>
+              <a:t>The hand-off queue is the one door into shared state, so a single writer thread is all that ever touches the window buffers.</a:t>
+            </a:r>
+          </a:p>
+          <a:p>
+            <a:pPr lvl="1">
+              <a:spcAft>
+                <a:spcPts val="600"/>
+              </a:spcAft>
+            </a:pPr>
+            <a:r>
+              <a:rPr sz="1300" b="0">
+                <a:solidFill>
+                  <a:srgbClr val="232A26"/>
+                </a:solidFill>
+                <a:latin typeface="Cambria"/>
+              </a:rPr>
+              <a:t>Real HTTP tests boot the actual server to prove it.</a:t>
+            </a:r>
+          </a:p>
+        </p:txBody>
+      </p:sp>
+    </p:spTree>
+  </p:cSld>
+  <p:clrMapOvr>
+    <a:masterClrMapping/>
+  </p:clrMapOvr>
+</p:sld>
+</file>
+
+<file path=ppt/slides/slide6.xml><?xml version="1.0" encoding="utf-8"?>
+<p:sld xmlns:a="http://schemas.openxmlformats.org/drawingml/2006/main" xmlns:p="http://schemas.openxmlformats.org/presentationml/2006/main" xmlns:r="http://schemas.openxmlformats.org/officeDocument/2006/relationships">
+  <p:cSld>
+    <p:spTree>
+      <p:nvGrpSpPr>
+        <p:cNvPr id="1" name=""/>
+        <p:cNvGrpSpPr/>
+        <p:nvPr/>
+      </p:nvGrpSpPr>
+      <p:grpSpPr/>
+      <p:sp>
+        <p:nvSpPr>
+          <p:cNvPr id="4" name="Rounded Rectangle 3"/>
+          <p:cNvSpPr/>
+          <p:nvPr/>
+        </p:nvSpPr>
+        <p:spPr>
+          <a:xfrm>
+            <a:off x="502920" y="457200"/>
+            <a:ext cx="11183112" cy="5943600"/>
+          </a:xfrm>
+          <a:prstGeom prst="roundRect">
+            <a:avLst/>
+          </a:prstGeom>
+          <a:solidFill>
+            <a:srgbClr val="E9EFEB"/>
+          </a:solidFill>
+          <a:ln w="15240">
+            <a:solidFill>
+              <a:srgbClr val="4A7C59"/>
+            </a:solidFill>
+          </a:ln>
+          <a:effectLst/>
+        </p:spPr>
+        <p:style>
+          <a:lnRef idx="1">
+            <a:schemeClr val="accent1"/>
+          </a:lnRef>
+          <a:fillRef idx="3">
+            <a:schemeClr val="accent1"/>
+          </a:fillRef>
+          <a:effectRef idx="2">
+            <a:schemeClr val="accent1"/>
+          </a:effectRef>
+          <a:fontRef idx="minor">
+            <a:schemeClr val="lt1"/>
+          </a:fontRef>
+        </p:style>
+        <p:txBody>
+          <a:bodyPr rtlCol="0" anchor="ctr"/>
+          <a:lstStyle/>
+          <a:p>
+            <a:pPr algn="ctr"/>
+          </a:p>
+        </p:txBody>
+      </p:sp>
+      <p:sp>
+        <p:nvSpPr>
           <p:cNvPr id="5" name="Rectangle 4"/>
           <p:cNvSpPr/>
           <p:nvPr/>
         </p:nvSpPr>
         <p:spPr>
           <a:xfrm>
-            <a:off x="457200" y="457200"/>
-            <a:ext cx="118872" cy="1920240"/>
+            <a:off x="502920" y="457200"/>
+            <a:ext cx="11183112" cy="640080"/>
           </a:xfrm>
           <a:prstGeom prst="rect">
             <a:avLst/>
           </a:prstGeom>
           <a:solidFill>
-            <a:srgbClr val="6A4A9A"/>
+            <a:srgbClr val="4A7C59"/>
           </a:solidFill>
           <a:ln>
             <a:noFill/>
@@ -4406,24 +4566,6 @@
           </a:p>
         </p:txBody>
       </p:sp>
-    </p:spTree>
-  </p:cSld>
-  <p:clrMapOvr>
-    <a:masterClrMapping/>
-  </p:clrMapOvr>
-</p:sld>
-</file>
-
-<file path=ppt/slides/slide6.xml><?xml version="1.0" encoding="utf-8"?>
-<p:sld xmlns:a="http://schemas.openxmlformats.org/drawingml/2006/main" xmlns:p="http://schemas.openxmlformats.org/presentationml/2006/main" xmlns:r="http://schemas.openxmlformats.org/officeDocument/2006/relationships">
-  <p:cSld>
-    <p:spTree>
-      <p:nvGrpSpPr>
-        <p:cNvPr id="1" name=""/>
-        <p:cNvGrpSpPr/>
-        <p:nvPr/>
-      </p:nvGrpSpPr>
-      <p:grpSpPr/>
       <p:sp>
         <p:nvSpPr>
           <p:cNvPr id="2" name="Title 1"/>
@@ -4436,21 +4578,21 @@
         </p:nvSpPr>
         <p:spPr>
           <a:xfrm>
-            <a:off x="713232" y="777240"/>
-            <a:ext cx="10607040" cy="868680"/>
+            <a:off x="822960" y="457200"/>
+            <a:ext cx="10515600" cy="640080"/>
           </a:xfrm>
         </p:spPr>
         <p:txBody>
-          <a:bodyPr wrap="square" anchor="t"/>
+          <a:bodyPr wrap="square" anchor="ctr"/>
           <a:lstStyle/>
           <a:p>
             <a:pPr algn="l"/>
             <a:r>
-              <a:rPr b="1" sz="2700">
-                <a:solidFill>
-                  <a:srgbClr val="6A4A9A"/>
-                </a:solidFill>
-                <a:latin typeface="Constantia"/>
+              <a:rPr b="1" sz="2200">
+                <a:solidFill>
+                  <a:srgbClr val="FFFFFF"/>
+                </a:solidFill>
+                <a:latin typeface="Georgia"/>
               </a:rPr>
               <a:t>What this project shows</a:t>
             </a:r>
@@ -4469,8 +4611,8 @@
         </p:nvSpPr>
         <p:spPr>
           <a:xfrm>
-            <a:off x="713232" y="1828800"/>
-            <a:ext cx="10698480" cy="4526280"/>
+            <a:off x="960120" y="1371600"/>
+            <a:ext cx="10241280" cy="4754880"/>
           </a:xfrm>
         </p:spPr>
         <p:txBody>
@@ -4485,11 +4627,11 @@
               </a:spcAft>
             </a:pPr>
             <a:r>
-              <a:rPr sz="1700" b="1">
-                <a:solidFill>
-                  <a:srgbClr val="6A4A9A"/>
-                </a:solidFill>
-                <a:latin typeface="Georgia"/>
+              <a:rPr sz="1700" b="0">
+                <a:solidFill>
+                  <a:srgbClr val="232A26"/>
+                </a:solidFill>
+                <a:latin typeface="Cambria"/>
               </a:rPr>
               <a:t>Think at the edge</a:t>
             </a:r>
@@ -4505,7 +4647,7 @@
                 <a:solidFill>
                   <a:srgbClr val="232A26"/>
                 </a:solidFill>
-                <a:latin typeface="Georgia"/>
+                <a:latin typeface="Cambria"/>
               </a:rPr>
               <a:t>The fog node turns two-second raw readings into windowed aggregates and local alerts before anything reaches the cloud.</a:t>
             </a:r>
@@ -4517,11 +4659,11 @@
               </a:spcAft>
             </a:pPr>
             <a:r>
-              <a:rPr sz="1700" b="1">
-                <a:solidFill>
-                  <a:srgbClr val="6A4A9A"/>
-                </a:solidFill>
-                <a:latin typeface="Georgia"/>
+              <a:rPr sz="1700" b="0">
+                <a:solidFill>
+                  <a:srgbClr val="232A26"/>
+                </a:solidFill>
+                <a:latin typeface="Cambria"/>
               </a:rPr>
               <a:t>Stay serverless</a:t>
             </a:r>
@@ -4537,7 +4679,7 @@
                 <a:solidFill>
                   <a:srgbClr val="232A26"/>
                 </a:solidFill>
-                <a:latin typeface="Georgia"/>
+                <a:latin typeface="Cambria"/>
               </a:rPr>
               <a:t>Amazon SQS, AWS Lambda and DynamoDB absorbed a 2,000-message burst with no servers to size or manage.</a:t>
             </a:r>
@@ -4549,11 +4691,11 @@
               </a:spcAft>
             </a:pPr>
             <a:r>
-              <a:rPr sz="1700" b="1">
-                <a:solidFill>
-                  <a:srgbClr val="6A4A9A"/>
-                </a:solidFill>
-                <a:latin typeface="Georgia"/>
+              <a:rPr sz="1700" b="0">
+                <a:solidFill>
+                  <a:srgbClr val="232A26"/>
+                </a:solidFill>
+                <a:latin typeface="Cambria"/>
               </a:rPr>
               <a:t>Prove it works</a:t>
             </a:r>
@@ -4569,7 +4711,7 @@
                 <a:solidFill>
                   <a:srgbClr val="232A26"/>
                 </a:solidFill>
-                <a:latin typeface="Georgia"/>
+                <a:latin typeface="Cambria"/>
               </a:rPr>
               <a:t>129 automated tests and an end-to-end pipeline check back every claim, and one scripted step takes it to a real AWS account.</a:t>
             </a:r>
@@ -4585,98 +4727,10 @@
                 <a:solidFill>
                   <a:srgbClr val="232A26"/>
                 </a:solidFill>
-                <a:latin typeface="Georgia"/>
+                <a:latin typeface="Cambria"/>
               </a:rPr>
               <a:t>Thank you. Questions?</a:t>
             </a:r>
-          </a:p>
-        </p:txBody>
-      </p:sp>
-      <p:sp>
-        <p:nvSpPr>
-          <p:cNvPr id="4" name="Rectangle 3"/>
-          <p:cNvSpPr/>
-          <p:nvPr/>
-        </p:nvSpPr>
-        <p:spPr>
-          <a:xfrm>
-            <a:off x="457200" y="457200"/>
-            <a:ext cx="3017520" cy="118872"/>
-          </a:xfrm>
-          <a:prstGeom prst="rect">
-            <a:avLst/>
-          </a:prstGeom>
-          <a:solidFill>
-            <a:srgbClr val="6A4A9A"/>
-          </a:solidFill>
-          <a:ln>
-            <a:noFill/>
-          </a:ln>
-          <a:effectLst/>
-        </p:spPr>
-        <p:style>
-          <a:lnRef idx="1">
-            <a:schemeClr val="accent1"/>
-          </a:lnRef>
-          <a:fillRef idx="3">
-            <a:schemeClr val="accent1"/>
-          </a:fillRef>
-          <a:effectRef idx="2">
-            <a:schemeClr val="accent1"/>
-          </a:effectRef>
-          <a:fontRef idx="minor">
-            <a:schemeClr val="lt1"/>
-          </a:fontRef>
-        </p:style>
-        <p:txBody>
-          <a:bodyPr rtlCol="0" anchor="ctr"/>
-          <a:lstStyle/>
-          <a:p>
-            <a:pPr algn="ctr"/>
-          </a:p>
-        </p:txBody>
-      </p:sp>
-      <p:sp>
-        <p:nvSpPr>
-          <p:cNvPr id="5" name="Rectangle 4"/>
-          <p:cNvSpPr/>
-          <p:nvPr/>
-        </p:nvSpPr>
-        <p:spPr>
-          <a:xfrm>
-            <a:off x="457200" y="457200"/>
-            <a:ext cx="118872" cy="1920240"/>
-          </a:xfrm>
-          <a:prstGeom prst="rect">
-            <a:avLst/>
-          </a:prstGeom>
-          <a:solidFill>
-            <a:srgbClr val="6A4A9A"/>
-          </a:solidFill>
-          <a:ln>
-            <a:noFill/>
-          </a:ln>
-          <a:effectLst/>
-        </p:spPr>
-        <p:style>
-          <a:lnRef idx="1">
-            <a:schemeClr val="accent1"/>
-          </a:lnRef>
-          <a:fillRef idx="3">
-            <a:schemeClr val="accent1"/>
-          </a:fillRef>
-          <a:effectRef idx="2">
-            <a:schemeClr val="accent1"/>
-          </a:effectRef>
-          <a:fontRef idx="minor">
-            <a:schemeClr val="lt1"/>
-          </a:fontRef>
-        </p:style>
-        <p:txBody>
-          <a:bodyPr rtlCol="0" anchor="ctr"/>
-          <a:lstStyle/>
-          <a:p>
-            <a:pPr algn="ctr"/>
           </a:p>
         </p:txBody>
       </p:sp>

--- a/ppt/smart-building-energy.pptx
+++ b/ppt/smart-building-energy.pptx
@@ -3318,60 +3318,14 @@
       <p:grpSpPr/>
       <p:sp>
         <p:nvSpPr>
-          <p:cNvPr id="4" name="Rounded Rectangle 3"/>
+          <p:cNvPr id="4" name="Rectangle 3"/>
           <p:cNvSpPr/>
           <p:nvPr/>
         </p:nvSpPr>
         <p:spPr>
           <a:xfrm>
-            <a:off x="502920" y="457200"/>
-            <a:ext cx="11183112" cy="5943600"/>
-          </a:xfrm>
-          <a:prstGeom prst="roundRect">
-            <a:avLst/>
-          </a:prstGeom>
-          <a:solidFill>
-            <a:srgbClr val="E9EFEB"/>
-          </a:solidFill>
-          <a:ln w="15240">
-            <a:solidFill>
-              <a:srgbClr val="4A7C59"/>
-            </a:solidFill>
-          </a:ln>
-          <a:effectLst/>
-        </p:spPr>
-        <p:style>
-          <a:lnRef idx="1">
-            <a:schemeClr val="accent1"/>
-          </a:lnRef>
-          <a:fillRef idx="3">
-            <a:schemeClr val="accent1"/>
-          </a:fillRef>
-          <a:effectRef idx="2">
-            <a:schemeClr val="accent1"/>
-          </a:effectRef>
-          <a:fontRef idx="minor">
-            <a:schemeClr val="lt1"/>
-          </a:fontRef>
-        </p:style>
-        <p:txBody>
-          <a:bodyPr rtlCol="0" anchor="ctr"/>
-          <a:lstStyle/>
-          <a:p>
-            <a:pPr algn="ctr"/>
-          </a:p>
-        </p:txBody>
-      </p:sp>
-      <p:sp>
-        <p:nvSpPr>
-          <p:cNvPr id="5" name="Rectangle 4"/>
-          <p:cNvSpPr/>
-          <p:nvPr/>
-        </p:nvSpPr>
-        <p:spPr>
-          <a:xfrm>
-            <a:off x="502920" y="457200"/>
-            <a:ext cx="11183112" cy="640080"/>
+            <a:off x="-91440" y="0"/>
+            <a:ext cx="12435840" cy="146304"/>
           </a:xfrm>
           <a:prstGeom prst="rect">
             <a:avLst/>
@@ -3418,19 +3372,19 @@
         </p:nvSpPr>
         <p:spPr>
           <a:xfrm>
-            <a:off x="822960" y="457200"/>
-            <a:ext cx="10515600" cy="640080"/>
+            <a:off x="640080" y="457200"/>
+            <a:ext cx="10972800" cy="868680"/>
           </a:xfrm>
         </p:spPr>
         <p:txBody>
-          <a:bodyPr wrap="square" anchor="ctr"/>
+          <a:bodyPr wrap="square" anchor="t"/>
           <a:lstStyle/>
           <a:p>
             <a:pPr algn="l"/>
             <a:r>
-              <a:rPr b="1" sz="2200">
-                <a:solidFill>
-                  <a:srgbClr val="FFFFFF"/>
+              <a:rPr b="1" sz="2700">
+                <a:solidFill>
+                  <a:srgbClr val="4A7C59"/>
                 </a:solidFill>
                 <a:latin typeface="Georgia"/>
               </a:rPr>
@@ -3451,8 +3405,8 @@
         </p:nvSpPr>
         <p:spPr>
           <a:xfrm>
-            <a:off x="960120" y="1371600"/>
-            <a:ext cx="10241280" cy="4754880"/>
+            <a:off x="658368" y="1508760"/>
+            <a:ext cx="10972800" cy="4754880"/>
           </a:xfrm>
         </p:spPr>
         <p:txBody>
@@ -3610,60 +3564,14 @@
       <p:grpSpPr/>
       <p:sp>
         <p:nvSpPr>
-          <p:cNvPr id="4" name="Rounded Rectangle 3"/>
+          <p:cNvPr id="4" name="Rectangle 3"/>
           <p:cNvSpPr/>
           <p:nvPr/>
         </p:nvSpPr>
         <p:spPr>
           <a:xfrm>
-            <a:off x="502920" y="457200"/>
-            <a:ext cx="11183112" cy="5943600"/>
-          </a:xfrm>
-          <a:prstGeom prst="roundRect">
-            <a:avLst/>
-          </a:prstGeom>
-          <a:solidFill>
-            <a:srgbClr val="E9EFEB"/>
-          </a:solidFill>
-          <a:ln w="15240">
-            <a:solidFill>
-              <a:srgbClr val="4A7C59"/>
-            </a:solidFill>
-          </a:ln>
-          <a:effectLst/>
-        </p:spPr>
-        <p:style>
-          <a:lnRef idx="1">
-            <a:schemeClr val="accent1"/>
-          </a:lnRef>
-          <a:fillRef idx="3">
-            <a:schemeClr val="accent1"/>
-          </a:fillRef>
-          <a:effectRef idx="2">
-            <a:schemeClr val="accent1"/>
-          </a:effectRef>
-          <a:fontRef idx="minor">
-            <a:schemeClr val="lt1"/>
-          </a:fontRef>
-        </p:style>
-        <p:txBody>
-          <a:bodyPr rtlCol="0" anchor="ctr"/>
-          <a:lstStyle/>
-          <a:p>
-            <a:pPr algn="ctr"/>
-          </a:p>
-        </p:txBody>
-      </p:sp>
-      <p:sp>
-        <p:nvSpPr>
-          <p:cNvPr id="5" name="Rectangle 4"/>
-          <p:cNvSpPr/>
-          <p:nvPr/>
-        </p:nvSpPr>
-        <p:spPr>
-          <a:xfrm>
-            <a:off x="502920" y="457200"/>
-            <a:ext cx="11183112" cy="640080"/>
+            <a:off x="-91440" y="0"/>
+            <a:ext cx="12435840" cy="146304"/>
           </a:xfrm>
           <a:prstGeom prst="rect">
             <a:avLst/>
@@ -3710,19 +3618,19 @@
         </p:nvSpPr>
         <p:spPr>
           <a:xfrm>
-            <a:off x="822960" y="457200"/>
-            <a:ext cx="10515600" cy="640080"/>
+            <a:off x="640080" y="457200"/>
+            <a:ext cx="10972800" cy="868680"/>
           </a:xfrm>
         </p:spPr>
         <p:txBody>
-          <a:bodyPr wrap="square" anchor="ctr"/>
+          <a:bodyPr wrap="square" anchor="t"/>
           <a:lstStyle/>
           <a:p>
             <a:pPr algn="l"/>
             <a:r>
-              <a:rPr b="1" sz="2200">
-                <a:solidFill>
-                  <a:srgbClr val="FFFFFF"/>
+              <a:rPr b="1" sz="2700">
+                <a:solidFill>
+                  <a:srgbClr val="4A7C59"/>
                 </a:solidFill>
                 <a:latin typeface="Georgia"/>
               </a:rPr>
@@ -3743,8 +3651,8 @@
         </p:nvSpPr>
         <p:spPr>
           <a:xfrm>
-            <a:off x="960120" y="1371600"/>
-            <a:ext cx="10241280" cy="4754880"/>
+            <a:off x="658368" y="1508760"/>
+            <a:ext cx="10972800" cy="4754880"/>
           </a:xfrm>
         </p:spPr>
         <p:txBody>
@@ -3934,60 +3842,14 @@
       <p:grpSpPr/>
       <p:sp>
         <p:nvSpPr>
-          <p:cNvPr id="4" name="Rounded Rectangle 3"/>
+          <p:cNvPr id="4" name="Rectangle 3"/>
           <p:cNvSpPr/>
           <p:nvPr/>
         </p:nvSpPr>
         <p:spPr>
           <a:xfrm>
-            <a:off x="502920" y="457200"/>
-            <a:ext cx="11183112" cy="5943600"/>
-          </a:xfrm>
-          <a:prstGeom prst="roundRect">
-            <a:avLst/>
-          </a:prstGeom>
-          <a:solidFill>
-            <a:srgbClr val="E9EFEB"/>
-          </a:solidFill>
-          <a:ln w="15240">
-            <a:solidFill>
-              <a:srgbClr val="4A7C59"/>
-            </a:solidFill>
-          </a:ln>
-          <a:effectLst/>
-        </p:spPr>
-        <p:style>
-          <a:lnRef idx="1">
-            <a:schemeClr val="accent1"/>
-          </a:lnRef>
-          <a:fillRef idx="3">
-            <a:schemeClr val="accent1"/>
-          </a:fillRef>
-          <a:effectRef idx="2">
-            <a:schemeClr val="accent1"/>
-          </a:effectRef>
-          <a:fontRef idx="minor">
-            <a:schemeClr val="lt1"/>
-          </a:fontRef>
-        </p:style>
-        <p:txBody>
-          <a:bodyPr rtlCol="0" anchor="ctr"/>
-          <a:lstStyle/>
-          <a:p>
-            <a:pPr algn="ctr"/>
-          </a:p>
-        </p:txBody>
-      </p:sp>
-      <p:sp>
-        <p:nvSpPr>
-          <p:cNvPr id="5" name="Rectangle 4"/>
-          <p:cNvSpPr/>
-          <p:nvPr/>
-        </p:nvSpPr>
-        <p:spPr>
-          <a:xfrm>
-            <a:off x="502920" y="457200"/>
-            <a:ext cx="11183112" cy="640080"/>
+            <a:off x="-91440" y="0"/>
+            <a:ext cx="12435840" cy="146304"/>
           </a:xfrm>
           <a:prstGeom prst="rect">
             <a:avLst/>
@@ -4034,19 +3896,19 @@
         </p:nvSpPr>
         <p:spPr>
           <a:xfrm>
-            <a:off x="822960" y="457200"/>
-            <a:ext cx="10515600" cy="640080"/>
+            <a:off x="640080" y="457200"/>
+            <a:ext cx="10972800" cy="868680"/>
           </a:xfrm>
         </p:spPr>
         <p:txBody>
-          <a:bodyPr wrap="square" anchor="ctr"/>
+          <a:bodyPr wrap="square" anchor="t"/>
           <a:lstStyle/>
           <a:p>
             <a:pPr algn="l"/>
             <a:r>
-              <a:rPr b="1" sz="2200">
-                <a:solidFill>
-                  <a:srgbClr val="FFFFFF"/>
+              <a:rPr b="1" sz="2700">
+                <a:solidFill>
+                  <a:srgbClr val="4A7C59"/>
                 </a:solidFill>
                 <a:latin typeface="Georgia"/>
               </a:rPr>
@@ -4067,8 +3929,8 @@
         </p:nvSpPr>
         <p:spPr>
           <a:xfrm>
-            <a:off x="960120" y="1371600"/>
-            <a:ext cx="5394960" cy="4754880"/>
+            <a:off x="658368" y="1508760"/>
+            <a:ext cx="5760720" cy="4663440"/>
           </a:xfrm>
         </p:spPr>
         <p:txBody>
@@ -4144,7 +4006,7 @@
       </p:sp>
       <p:pic>
         <p:nvPicPr>
-          <p:cNvPr id="6" name="Picture 5" descr="dashboard-desktop.png"/>
+          <p:cNvPr id="5" name="Picture 4" descr="dashboard-desktop.png"/>
           <p:cNvPicPr>
             <a:picLocks noChangeAspect="1"/>
           </p:cNvPicPr>
@@ -4158,7 +4020,7 @@
         </p:blipFill>
         <p:spPr>
           <a:xfrm>
-            <a:off x="6858769" y="1463040"/>
+            <a:off x="7178809" y="1554480"/>
             <a:ext cx="4021821" cy="4480560"/>
           </a:xfrm>
           <a:prstGeom prst="rect">
@@ -4186,60 +4048,14 @@
       <p:grpSpPr/>
       <p:sp>
         <p:nvSpPr>
-          <p:cNvPr id="4" name="Rounded Rectangle 3"/>
+          <p:cNvPr id="4" name="Rectangle 3"/>
           <p:cNvSpPr/>
           <p:nvPr/>
         </p:nvSpPr>
         <p:spPr>
           <a:xfrm>
-            <a:off x="502920" y="457200"/>
-            <a:ext cx="11183112" cy="5943600"/>
-          </a:xfrm>
-          <a:prstGeom prst="roundRect">
-            <a:avLst/>
-          </a:prstGeom>
-          <a:solidFill>
-            <a:srgbClr val="E9EFEB"/>
-          </a:solidFill>
-          <a:ln w="15240">
-            <a:solidFill>
-              <a:srgbClr val="4A7C59"/>
-            </a:solidFill>
-          </a:ln>
-          <a:effectLst/>
-        </p:spPr>
-        <p:style>
-          <a:lnRef idx="1">
-            <a:schemeClr val="accent1"/>
-          </a:lnRef>
-          <a:fillRef idx="3">
-            <a:schemeClr val="accent1"/>
-          </a:fillRef>
-          <a:effectRef idx="2">
-            <a:schemeClr val="accent1"/>
-          </a:effectRef>
-          <a:fontRef idx="minor">
-            <a:schemeClr val="lt1"/>
-          </a:fontRef>
-        </p:style>
-        <p:txBody>
-          <a:bodyPr rtlCol="0" anchor="ctr"/>
-          <a:lstStyle/>
-          <a:p>
-            <a:pPr algn="ctr"/>
-          </a:p>
-        </p:txBody>
-      </p:sp>
-      <p:sp>
-        <p:nvSpPr>
-          <p:cNvPr id="5" name="Rectangle 4"/>
-          <p:cNvSpPr/>
-          <p:nvPr/>
-        </p:nvSpPr>
-        <p:spPr>
-          <a:xfrm>
-            <a:off x="502920" y="457200"/>
-            <a:ext cx="11183112" cy="640080"/>
+            <a:off x="-91440" y="0"/>
+            <a:ext cx="12435840" cy="146304"/>
           </a:xfrm>
           <a:prstGeom prst="rect">
             <a:avLst/>
@@ -4286,19 +4102,19 @@
         </p:nvSpPr>
         <p:spPr>
           <a:xfrm>
-            <a:off x="822960" y="457200"/>
-            <a:ext cx="10515600" cy="640080"/>
+            <a:off x="640080" y="457200"/>
+            <a:ext cx="10972800" cy="868680"/>
           </a:xfrm>
         </p:spPr>
         <p:txBody>
-          <a:bodyPr wrap="square" anchor="ctr"/>
+          <a:bodyPr wrap="square" anchor="t"/>
           <a:lstStyle/>
           <a:p>
             <a:pPr algn="l"/>
             <a:r>
-              <a:rPr b="1" sz="2200">
-                <a:solidFill>
-                  <a:srgbClr val="FFFFFF"/>
+              <a:rPr b="1" sz="2700">
+                <a:solidFill>
+                  <a:srgbClr val="4A7C59"/>
                 </a:solidFill>
                 <a:latin typeface="Georgia"/>
               </a:rPr>
@@ -4319,8 +4135,8 @@
         </p:nvSpPr>
         <p:spPr>
           <a:xfrm>
-            <a:off x="960120" y="1371600"/>
-            <a:ext cx="10241280" cy="4754880"/>
+            <a:off x="658368" y="1508760"/>
+            <a:ext cx="10972800" cy="4754880"/>
           </a:xfrm>
         </p:spPr>
         <p:txBody>
@@ -4478,60 +4294,14 @@
       <p:grpSpPr/>
       <p:sp>
         <p:nvSpPr>
-          <p:cNvPr id="4" name="Rounded Rectangle 3"/>
+          <p:cNvPr id="4" name="Rectangle 3"/>
           <p:cNvSpPr/>
           <p:nvPr/>
         </p:nvSpPr>
         <p:spPr>
           <a:xfrm>
-            <a:off x="502920" y="457200"/>
-            <a:ext cx="11183112" cy="5943600"/>
-          </a:xfrm>
-          <a:prstGeom prst="roundRect">
-            <a:avLst/>
-          </a:prstGeom>
-          <a:solidFill>
-            <a:srgbClr val="E9EFEB"/>
-          </a:solidFill>
-          <a:ln w="15240">
-            <a:solidFill>
-              <a:srgbClr val="4A7C59"/>
-            </a:solidFill>
-          </a:ln>
-          <a:effectLst/>
-        </p:spPr>
-        <p:style>
-          <a:lnRef idx="1">
-            <a:schemeClr val="accent1"/>
-          </a:lnRef>
-          <a:fillRef idx="3">
-            <a:schemeClr val="accent1"/>
-          </a:fillRef>
-          <a:effectRef idx="2">
-            <a:schemeClr val="accent1"/>
-          </a:effectRef>
-          <a:fontRef idx="minor">
-            <a:schemeClr val="lt1"/>
-          </a:fontRef>
-        </p:style>
-        <p:txBody>
-          <a:bodyPr rtlCol="0" anchor="ctr"/>
-          <a:lstStyle/>
-          <a:p>
-            <a:pPr algn="ctr"/>
-          </a:p>
-        </p:txBody>
-      </p:sp>
-      <p:sp>
-        <p:nvSpPr>
-          <p:cNvPr id="5" name="Rectangle 4"/>
-          <p:cNvSpPr/>
-          <p:nvPr/>
-        </p:nvSpPr>
-        <p:spPr>
-          <a:xfrm>
-            <a:off x="502920" y="457200"/>
-            <a:ext cx="11183112" cy="640080"/>
+            <a:off x="-91440" y="0"/>
+            <a:ext cx="12435840" cy="146304"/>
           </a:xfrm>
           <a:prstGeom prst="rect">
             <a:avLst/>
@@ -4578,19 +4348,19 @@
         </p:nvSpPr>
         <p:spPr>
           <a:xfrm>
-            <a:off x="822960" y="457200"/>
-            <a:ext cx="10515600" cy="640080"/>
+            <a:off x="640080" y="457200"/>
+            <a:ext cx="10972800" cy="868680"/>
           </a:xfrm>
         </p:spPr>
         <p:txBody>
-          <a:bodyPr wrap="square" anchor="ctr"/>
+          <a:bodyPr wrap="square" anchor="t"/>
           <a:lstStyle/>
           <a:p>
             <a:pPr algn="l"/>
             <a:r>
-              <a:rPr b="1" sz="2200">
-                <a:solidFill>
-                  <a:srgbClr val="FFFFFF"/>
+              <a:rPr b="1" sz="2700">
+                <a:solidFill>
+                  <a:srgbClr val="4A7C59"/>
                 </a:solidFill>
                 <a:latin typeface="Georgia"/>
               </a:rPr>
@@ -4611,8 +4381,8 @@
         </p:nvSpPr>
         <p:spPr>
           <a:xfrm>
-            <a:off x="960120" y="1371600"/>
-            <a:ext cx="10241280" cy="4754880"/>
+            <a:off x="658368" y="1508760"/>
+            <a:ext cx="10972800" cy="4754880"/>
           </a:xfrm>
         </p:spPr>
         <p:txBody>
